--- a/mavenprojectSCR/src/main/resources/pie-chart-template.pptx
+++ b/mavenprojectSCR/src/main/resources/pie-chart-template.pptx
@@ -5,7 +5,9 @@
     <p:sldMasterId id="2147483648" r:id="rId1"/>
   </p:sldMasterIdLst>
   <p:sldIdLst>
-    <p:sldId id="256" r:id="rId2"/>
+    <p:sldId id="258" r:id="rId2"/>
+    <p:sldId id="256" r:id="rId3"/>
+    <p:sldId id="257" r:id="rId4"/>
   </p:sldIdLst>
   <p:sldSz cx="9144000" cy="6858000" type="screen4x3"/>
   <p:notesSz cx="6858000" cy="9144000"/>
@@ -104,13 +106,29 @@
       </a:defRPr>
     </a:lvl9pPr>
   </p:defaultTextStyle>
+  <p:extLst>
+    <p:ext uri="{EFAFB233-063F-42B5-8137-9DF3F51BA10A}">
+      <p15:sldGuideLst xmlns:p15="http://schemas.microsoft.com/office/powerpoint/2012/main">
+        <p15:guide id="1" orient="horz" pos="2160">
+          <p15:clr>
+            <a:srgbClr val="A4A3A4"/>
+          </p15:clr>
+        </p15:guide>
+        <p15:guide id="2" pos="2880">
+          <p15:clr>
+            <a:srgbClr val="A4A3A4"/>
+          </p15:clr>
+        </p15:guide>
+      </p15:sldGuideLst>
+    </p:ext>
+  </p:extLst>
 </p:presentation>
 </file>
 
 <file path=ppt/charts/chart1.xml><?xml version="1.0" encoding="utf-8"?>
-<c:chartSpace xmlns:c="http://schemas.openxmlformats.org/drawingml/2006/chart" xmlns:a="http://schemas.openxmlformats.org/drawingml/2006/main" xmlns:r="http://schemas.openxmlformats.org/officeDocument/2006/relationships">
+<c:chartSpace xmlns:c="http://schemas.openxmlformats.org/drawingml/2006/chart" xmlns:a="http://schemas.openxmlformats.org/drawingml/2006/main" xmlns:r="http://schemas.openxmlformats.org/officeDocument/2006/relationships" xmlns:c16r2="http://schemas.microsoft.com/office/drawing/2015/06/chart">
   <c:date1904 val="0"/>
-  <c:lang val="ru-RU"/>
+  <c:lang val="en-US"/>
   <c:roundedCorners val="0"/>
   <mc:AlternateContent xmlns:mc="http://schemas.openxmlformats.org/markup-compatibility/2006">
     <mc:Choice xmlns:c14="http://schemas.microsoft.com/office/drawing/2007/8/2/chart" Requires="c14">
@@ -122,7 +140,338 @@
   </mc:AlternateContent>
   <c:chart>
     <c:title>
+      <c:overlay val="0"/>
+      <c:spPr>
+        <a:noFill/>
+        <a:ln>
+          <a:noFill/>
+        </a:ln>
+        <a:effectLst/>
+      </c:spPr>
+      <c:txPr>
+        <a:bodyPr rot="0" spcFirstLastPara="1" vertOverflow="ellipsis" vert="horz" wrap="square" anchor="ctr" anchorCtr="1"/>
+        <a:lstStyle/>
+        <a:p>
+          <a:pPr>
+            <a:defRPr sz="1862" b="0" i="0" u="none" strike="noStrike" kern="1200" spc="0" baseline="0">
+              <a:solidFill>
+                <a:schemeClr val="tx1">
+                  <a:lumMod val="65000"/>
+                  <a:lumOff val="35000"/>
+                </a:schemeClr>
+              </a:solidFill>
+              <a:latin typeface="+mn-lt"/>
+              <a:ea typeface="+mn-ea"/>
+              <a:cs typeface="+mn-cs"/>
+            </a:defRPr>
+          </a:pPr>
+          <a:endParaRPr lang="en-US"/>
+        </a:p>
+      </c:txPr>
+    </c:title>
+    <c:autoTitleDeleted val="0"/>
+    <c:view3D>
+      <c:rotX val="30"/>
+      <c:rotY val="0"/>
+      <c:depthPercent val="100"/>
+      <c:rAngAx val="0"/>
+    </c:view3D>
+    <c:floor>
+      <c:thickness val="0"/>
+      <c:spPr>
+        <a:noFill/>
+        <a:ln>
+          <a:noFill/>
+        </a:ln>
+        <a:effectLst/>
+        <a:sp3d/>
+      </c:spPr>
+    </c:floor>
+    <c:sideWall>
+      <c:thickness val="0"/>
+      <c:spPr>
+        <a:noFill/>
+        <a:ln>
+          <a:noFill/>
+        </a:ln>
+        <a:effectLst/>
+        <a:sp3d/>
+      </c:spPr>
+    </c:sideWall>
+    <c:backWall>
+      <c:thickness val="0"/>
+      <c:spPr>
+        <a:noFill/>
+        <a:ln>
+          <a:noFill/>
+        </a:ln>
+        <a:effectLst/>
+        <a:sp3d/>
+      </c:spPr>
+    </c:backWall>
+    <c:plotArea>
       <c:layout/>
+      <c:pie3DChart>
+        <c:varyColors val="1"/>
+        <c:ser>
+          <c:idx val="0"/>
+          <c:order val="0"/>
+          <c:tx>
+            <c:strRef>
+              <c:f>Sheet1!$B$1</c:f>
+              <c:strCache>
+                <c:ptCount val="1"/>
+                <c:pt idx="0">
+                  <c:v>Sales</c:v>
+                </c:pt>
+              </c:strCache>
+            </c:strRef>
+          </c:tx>
+          <c:dPt>
+            <c:idx val="0"/>
+            <c:bubble3D val="0"/>
+            <c:spPr>
+              <a:solidFill>
+                <a:schemeClr val="accent1"/>
+              </a:solidFill>
+              <a:ln w="25400">
+                <a:solidFill>
+                  <a:schemeClr val="lt1"/>
+                </a:solidFill>
+              </a:ln>
+              <a:effectLst/>
+              <a:sp3d contourW="25400">
+                <a:contourClr>
+                  <a:schemeClr val="lt1"/>
+                </a:contourClr>
+              </a:sp3d>
+            </c:spPr>
+            <c:extLst>
+              <c:ext xmlns:c16="http://schemas.microsoft.com/office/drawing/2014/chart" uri="{C3380CC4-5D6E-409C-BE32-E72D297353CC}">
+                <c16:uniqueId val="{00000001-6801-A642-B70E-EBF04B6989E0}"/>
+              </c:ext>
+            </c:extLst>
+          </c:dPt>
+          <c:dPt>
+            <c:idx val="1"/>
+            <c:bubble3D val="0"/>
+            <c:spPr>
+              <a:solidFill>
+                <a:schemeClr val="accent2"/>
+              </a:solidFill>
+              <a:ln w="25400">
+                <a:solidFill>
+                  <a:schemeClr val="lt1"/>
+                </a:solidFill>
+              </a:ln>
+              <a:effectLst/>
+              <a:sp3d contourW="25400">
+                <a:contourClr>
+                  <a:schemeClr val="lt1"/>
+                </a:contourClr>
+              </a:sp3d>
+            </c:spPr>
+            <c:extLst>
+              <c:ext xmlns:c16="http://schemas.microsoft.com/office/drawing/2014/chart" uri="{C3380CC4-5D6E-409C-BE32-E72D297353CC}">
+                <c16:uniqueId val="{00000003-6801-A642-B70E-EBF04B6989E0}"/>
+              </c:ext>
+            </c:extLst>
+          </c:dPt>
+          <c:dPt>
+            <c:idx val="2"/>
+            <c:bubble3D val="0"/>
+            <c:spPr>
+              <a:solidFill>
+                <a:schemeClr val="accent3"/>
+              </a:solidFill>
+              <a:ln w="25400">
+                <a:solidFill>
+                  <a:schemeClr val="lt1"/>
+                </a:solidFill>
+              </a:ln>
+              <a:effectLst/>
+              <a:sp3d contourW="25400">
+                <a:contourClr>
+                  <a:schemeClr val="lt1"/>
+                </a:contourClr>
+              </a:sp3d>
+            </c:spPr>
+            <c:extLst>
+              <c:ext xmlns:c16="http://schemas.microsoft.com/office/drawing/2014/chart" uri="{C3380CC4-5D6E-409C-BE32-E72D297353CC}">
+                <c16:uniqueId val="{00000005-6801-A642-B70E-EBF04B6989E0}"/>
+              </c:ext>
+            </c:extLst>
+          </c:dPt>
+          <c:dPt>
+            <c:idx val="3"/>
+            <c:bubble3D val="0"/>
+            <c:spPr>
+              <a:solidFill>
+                <a:schemeClr val="accent4"/>
+              </a:solidFill>
+              <a:ln w="25400">
+                <a:solidFill>
+                  <a:schemeClr val="lt1"/>
+                </a:solidFill>
+              </a:ln>
+              <a:effectLst/>
+              <a:sp3d contourW="25400">
+                <a:contourClr>
+                  <a:schemeClr val="lt1"/>
+                </a:contourClr>
+              </a:sp3d>
+            </c:spPr>
+            <c:extLst>
+              <c:ext xmlns:c16="http://schemas.microsoft.com/office/drawing/2014/chart" uri="{C3380CC4-5D6E-409C-BE32-E72D297353CC}">
+                <c16:uniqueId val="{00000007-6801-A642-B70E-EBF04B6989E0}"/>
+              </c:ext>
+            </c:extLst>
+          </c:dPt>
+          <c:cat>
+            <c:strRef>
+              <c:f>Sheet1!$A$2:$A$5</c:f>
+              <c:strCache>
+                <c:ptCount val="4"/>
+                <c:pt idx="0">
+                  <c:v>1st Qtr</c:v>
+                </c:pt>
+                <c:pt idx="1">
+                  <c:v>2nd Qtr</c:v>
+                </c:pt>
+                <c:pt idx="2">
+                  <c:v>3rd Qtr</c:v>
+                </c:pt>
+                <c:pt idx="3">
+                  <c:v>4th Qtr</c:v>
+                </c:pt>
+              </c:strCache>
+            </c:strRef>
+          </c:cat>
+          <c:val>
+            <c:numRef>
+              <c:f>Sheet1!$B$2:$B$5</c:f>
+              <c:numCache>
+                <c:formatCode>General</c:formatCode>
+                <c:ptCount val="4"/>
+                <c:pt idx="0">
+                  <c:v>8.1999999999999993</c:v>
+                </c:pt>
+                <c:pt idx="1">
+                  <c:v>3.2</c:v>
+                </c:pt>
+                <c:pt idx="2">
+                  <c:v>1.4</c:v>
+                </c:pt>
+                <c:pt idx="3">
+                  <c:v>1.2</c:v>
+                </c:pt>
+              </c:numCache>
+            </c:numRef>
+          </c:val>
+          <c:extLst>
+            <c:ext xmlns:c16="http://schemas.microsoft.com/office/drawing/2014/chart" uri="{C3380CC4-5D6E-409C-BE32-E72D297353CC}">
+              <c16:uniqueId val="{00000000-5EF6-6542-AF28-91493A6168AA}"/>
+            </c:ext>
+          </c:extLst>
+        </c:ser>
+        <c:dLbls>
+          <c:showLegendKey val="0"/>
+          <c:showVal val="0"/>
+          <c:showCatName val="0"/>
+          <c:showSerName val="0"/>
+          <c:showPercent val="0"/>
+          <c:showBubbleSize val="0"/>
+          <c:showLeaderLines val="1"/>
+        </c:dLbls>
+      </c:pie3DChart>
+      <c:spPr>
+        <a:noFill/>
+        <a:ln>
+          <a:noFill/>
+        </a:ln>
+        <a:effectLst/>
+      </c:spPr>
+    </c:plotArea>
+    <c:legend>
+      <c:legendPos val="b"/>
+      <c:overlay val="0"/>
+      <c:spPr>
+        <a:noFill/>
+        <a:ln>
+          <a:noFill/>
+        </a:ln>
+        <a:effectLst/>
+      </c:spPr>
+      <c:txPr>
+        <a:bodyPr rot="0" spcFirstLastPara="1" vertOverflow="ellipsis" vert="horz" wrap="square" anchor="ctr" anchorCtr="1"/>
+        <a:lstStyle/>
+        <a:p>
+          <a:pPr>
+            <a:defRPr sz="1197" b="0" i="0" u="none" strike="noStrike" kern="1200" baseline="0">
+              <a:solidFill>
+                <a:schemeClr val="tx1">
+                  <a:lumMod val="65000"/>
+                  <a:lumOff val="35000"/>
+                </a:schemeClr>
+              </a:solidFill>
+              <a:latin typeface="+mn-lt"/>
+              <a:ea typeface="+mn-ea"/>
+              <a:cs typeface="+mn-cs"/>
+            </a:defRPr>
+          </a:pPr>
+          <a:endParaRPr lang="en-US"/>
+        </a:p>
+      </c:txPr>
+    </c:legend>
+    <c:plotVisOnly val="1"/>
+    <c:dispBlanksAs val="gap"/>
+    <c:showDLblsOverMax val="0"/>
+    <c:extLst>
+      <c:ext xmlns:c16r3="http://schemas.microsoft.com/office/drawing/2017/03/chart" uri="{56B9EC1D-385E-4148-901F-78D8002777C0}">
+        <c16r3:dataDisplayOptions16>
+          <c16r3:dispNaAsBlank val="1"/>
+        </c16r3:dataDisplayOptions16>
+      </c:ext>
+    </c:extLst>
+  </c:chart>
+  <c:spPr>
+    <a:noFill/>
+    <a:ln>
+      <a:noFill/>
+    </a:ln>
+    <a:effectLst/>
+  </c:spPr>
+  <c:txPr>
+    <a:bodyPr/>
+    <a:lstStyle/>
+    <a:p>
+      <a:pPr>
+        <a:defRPr/>
+      </a:pPr>
+      <a:endParaRPr lang="en-US"/>
+    </a:p>
+  </c:txPr>
+  <c:externalData r:id="rId3">
+    <c:autoUpdate val="0"/>
+  </c:externalData>
+</c:chartSpace>
+</file>
+
+<file path=ppt/charts/chart2.xml><?xml version="1.0" encoding="utf-8"?>
+<c:chartSpace xmlns:c="http://schemas.openxmlformats.org/drawingml/2006/chart" xmlns:a="http://schemas.openxmlformats.org/drawingml/2006/main" xmlns:r="http://schemas.openxmlformats.org/officeDocument/2006/relationships" xmlns:c16r2="http://schemas.microsoft.com/office/drawing/2015/06/chart">
+  <c:date1904 val="0"/>
+  <c:lang val="en-US"/>
+  <c:roundedCorners val="0"/>
+  <mc:AlternateContent xmlns:mc="http://schemas.openxmlformats.org/markup-compatibility/2006">
+    <mc:Choice xmlns:c14="http://schemas.microsoft.com/office/drawing/2007/8/2/chart" Requires="c14">
+      <c14:style val="102"/>
+    </mc:Choice>
+    <mc:Fallback>
+      <c:style val="2"/>
+    </mc:Fallback>
+  </mc:AlternateContent>
+  <c:chart>
+    <c:title>
       <c:overlay val="0"/>
     </c:title>
     <c:autoTitleDeleted val="0"/>
@@ -185,6 +534,11 @@
               </c:numCache>
             </c:numRef>
           </c:val>
+          <c:extLst>
+            <c:ext xmlns:c16="http://schemas.microsoft.com/office/drawing/2014/chart" uri="{C3380CC4-5D6E-409C-BE32-E72D297353CC}">
+              <c16:uniqueId val="{00000000-B412-0D46-B8EC-9A6218988CF3}"/>
+            </c:ext>
+          </c:extLst>
         </c:ser>
         <c:dLbls>
           <c:showLegendKey val="0"/>
@@ -200,7 +554,6 @@
     </c:plotArea>
     <c:legend>
       <c:legendPos val="r"/>
-      <c:layout/>
       <c:overlay val="0"/>
     </c:legend>
     <c:plotVisOnly val="1"/>
@@ -223,6 +576,1456 @@
 </c:chartSpace>
 </file>
 
+<file path=ppt/charts/chart3.xml><?xml version="1.0" encoding="utf-8"?>
+<c:chartSpace xmlns:c="http://schemas.openxmlformats.org/drawingml/2006/chart" xmlns:a="http://schemas.openxmlformats.org/drawingml/2006/main" xmlns:r="http://schemas.openxmlformats.org/officeDocument/2006/relationships" xmlns:c16r2="http://schemas.microsoft.com/office/drawing/2015/06/chart">
+  <c:date1904 val="0"/>
+  <c:lang val="en-US"/>
+  <c:roundedCorners val="0"/>
+  <mc:AlternateContent xmlns:mc="http://schemas.openxmlformats.org/markup-compatibility/2006">
+    <mc:Choice xmlns:c14="http://schemas.microsoft.com/office/drawing/2007/8/2/chart" Requires="c14">
+      <c14:style val="102"/>
+    </mc:Choice>
+    <mc:Fallback>
+      <c:style val="2"/>
+    </mc:Fallback>
+  </mc:AlternateContent>
+  <c:chart>
+    <c:title>
+      <c:overlay val="0"/>
+      <c:spPr>
+        <a:noFill/>
+        <a:ln>
+          <a:noFill/>
+        </a:ln>
+        <a:effectLst/>
+      </c:spPr>
+      <c:txPr>
+        <a:bodyPr rot="0" spcFirstLastPara="1" vertOverflow="ellipsis" vert="horz" wrap="square" anchor="ctr" anchorCtr="1"/>
+        <a:lstStyle/>
+        <a:p>
+          <a:pPr>
+            <a:defRPr sz="1862" b="0" i="0" u="none" strike="noStrike" kern="1200" spc="0" baseline="0">
+              <a:solidFill>
+                <a:schemeClr val="tx1">
+                  <a:lumMod val="65000"/>
+                  <a:lumOff val="35000"/>
+                </a:schemeClr>
+              </a:solidFill>
+              <a:latin typeface="+mn-lt"/>
+              <a:ea typeface="+mn-ea"/>
+              <a:cs typeface="+mn-cs"/>
+            </a:defRPr>
+          </a:pPr>
+          <a:endParaRPr lang="en-US"/>
+        </a:p>
+      </c:txPr>
+    </c:title>
+    <c:autoTitleDeleted val="0"/>
+    <c:view3D>
+      <c:rotX val="30"/>
+      <c:rotY val="0"/>
+      <c:depthPercent val="100"/>
+      <c:rAngAx val="0"/>
+    </c:view3D>
+    <c:floor>
+      <c:thickness val="0"/>
+      <c:spPr>
+        <a:noFill/>
+        <a:ln>
+          <a:noFill/>
+        </a:ln>
+        <a:effectLst/>
+        <a:sp3d/>
+      </c:spPr>
+    </c:floor>
+    <c:sideWall>
+      <c:thickness val="0"/>
+      <c:spPr>
+        <a:noFill/>
+        <a:ln>
+          <a:noFill/>
+        </a:ln>
+        <a:effectLst/>
+        <a:sp3d/>
+      </c:spPr>
+    </c:sideWall>
+    <c:backWall>
+      <c:thickness val="0"/>
+      <c:spPr>
+        <a:noFill/>
+        <a:ln>
+          <a:noFill/>
+        </a:ln>
+        <a:effectLst/>
+        <a:sp3d/>
+      </c:spPr>
+    </c:backWall>
+    <c:plotArea>
+      <c:layout/>
+      <c:pie3DChart>
+        <c:varyColors val="1"/>
+        <c:ser>
+          <c:idx val="0"/>
+          <c:order val="0"/>
+          <c:tx>
+            <c:strRef>
+              <c:f>Sheet1!$B$1</c:f>
+              <c:strCache>
+                <c:ptCount val="1"/>
+                <c:pt idx="0">
+                  <c:v>Sales</c:v>
+                </c:pt>
+              </c:strCache>
+            </c:strRef>
+          </c:tx>
+          <c:dPt>
+            <c:idx val="0"/>
+            <c:bubble3D val="0"/>
+            <c:spPr>
+              <a:solidFill>
+                <a:schemeClr val="accent1"/>
+              </a:solidFill>
+              <a:ln w="25400">
+                <a:solidFill>
+                  <a:schemeClr val="lt1"/>
+                </a:solidFill>
+              </a:ln>
+              <a:effectLst/>
+              <a:sp3d contourW="25400">
+                <a:contourClr>
+                  <a:schemeClr val="lt1"/>
+                </a:contourClr>
+              </a:sp3d>
+            </c:spPr>
+            <c:extLst>
+              <c:ext xmlns:c16="http://schemas.microsoft.com/office/drawing/2014/chart" uri="{C3380CC4-5D6E-409C-BE32-E72D297353CC}">
+                <c16:uniqueId val="{00000001-54C5-8349-9BDA-63C7AA184D30}"/>
+              </c:ext>
+            </c:extLst>
+          </c:dPt>
+          <c:dPt>
+            <c:idx val="1"/>
+            <c:bubble3D val="0"/>
+            <c:spPr>
+              <a:solidFill>
+                <a:schemeClr val="accent2"/>
+              </a:solidFill>
+              <a:ln w="25400">
+                <a:solidFill>
+                  <a:schemeClr val="lt1"/>
+                </a:solidFill>
+              </a:ln>
+              <a:effectLst/>
+              <a:sp3d contourW="25400">
+                <a:contourClr>
+                  <a:schemeClr val="lt1"/>
+                </a:contourClr>
+              </a:sp3d>
+            </c:spPr>
+            <c:extLst>
+              <c:ext xmlns:c16="http://schemas.microsoft.com/office/drawing/2014/chart" uri="{C3380CC4-5D6E-409C-BE32-E72D297353CC}">
+                <c16:uniqueId val="{00000003-54C5-8349-9BDA-63C7AA184D30}"/>
+              </c:ext>
+            </c:extLst>
+          </c:dPt>
+          <c:dPt>
+            <c:idx val="2"/>
+            <c:bubble3D val="0"/>
+            <c:spPr>
+              <a:solidFill>
+                <a:schemeClr val="accent3"/>
+              </a:solidFill>
+              <a:ln w="25400">
+                <a:solidFill>
+                  <a:schemeClr val="lt1"/>
+                </a:solidFill>
+              </a:ln>
+              <a:effectLst/>
+              <a:sp3d contourW="25400">
+                <a:contourClr>
+                  <a:schemeClr val="lt1"/>
+                </a:contourClr>
+              </a:sp3d>
+            </c:spPr>
+            <c:extLst>
+              <c:ext xmlns:c16="http://schemas.microsoft.com/office/drawing/2014/chart" uri="{C3380CC4-5D6E-409C-BE32-E72D297353CC}">
+                <c16:uniqueId val="{00000005-54C5-8349-9BDA-63C7AA184D30}"/>
+              </c:ext>
+            </c:extLst>
+          </c:dPt>
+          <c:dPt>
+            <c:idx val="3"/>
+            <c:bubble3D val="0"/>
+            <c:spPr>
+              <a:solidFill>
+                <a:schemeClr val="accent4"/>
+              </a:solidFill>
+              <a:ln w="25400">
+                <a:solidFill>
+                  <a:schemeClr val="lt1"/>
+                </a:solidFill>
+              </a:ln>
+              <a:effectLst/>
+              <a:sp3d contourW="25400">
+                <a:contourClr>
+                  <a:schemeClr val="lt1"/>
+                </a:contourClr>
+              </a:sp3d>
+            </c:spPr>
+            <c:extLst>
+              <c:ext xmlns:c16="http://schemas.microsoft.com/office/drawing/2014/chart" uri="{C3380CC4-5D6E-409C-BE32-E72D297353CC}">
+                <c16:uniqueId val="{00000007-54C5-8349-9BDA-63C7AA184D30}"/>
+              </c:ext>
+            </c:extLst>
+          </c:dPt>
+          <c:cat>
+            <c:strRef>
+              <c:f>Sheet1!$A$2:$A$5</c:f>
+              <c:strCache>
+                <c:ptCount val="4"/>
+                <c:pt idx="0">
+                  <c:v>1st Qtr</c:v>
+                </c:pt>
+                <c:pt idx="1">
+                  <c:v>2nd Qtr</c:v>
+                </c:pt>
+                <c:pt idx="2">
+                  <c:v>3rd Qtr</c:v>
+                </c:pt>
+                <c:pt idx="3">
+                  <c:v>4th Qtr</c:v>
+                </c:pt>
+              </c:strCache>
+            </c:strRef>
+          </c:cat>
+          <c:val>
+            <c:numRef>
+              <c:f>Sheet1!$B$2:$B$5</c:f>
+              <c:numCache>
+                <c:formatCode>General</c:formatCode>
+                <c:ptCount val="4"/>
+                <c:pt idx="0">
+                  <c:v>8.1999999999999993</c:v>
+                </c:pt>
+                <c:pt idx="1">
+                  <c:v>3.2</c:v>
+                </c:pt>
+                <c:pt idx="2">
+                  <c:v>1.4</c:v>
+                </c:pt>
+                <c:pt idx="3">
+                  <c:v>1.2</c:v>
+                </c:pt>
+              </c:numCache>
+            </c:numRef>
+          </c:val>
+          <c:extLst>
+            <c:ext xmlns:c16="http://schemas.microsoft.com/office/drawing/2014/chart" uri="{C3380CC4-5D6E-409C-BE32-E72D297353CC}">
+              <c16:uniqueId val="{00000000-582E-6944-AE7C-9CB641BFD40D}"/>
+            </c:ext>
+          </c:extLst>
+        </c:ser>
+        <c:dLbls>
+          <c:showLegendKey val="0"/>
+          <c:showVal val="0"/>
+          <c:showCatName val="0"/>
+          <c:showSerName val="0"/>
+          <c:showPercent val="0"/>
+          <c:showBubbleSize val="0"/>
+          <c:showLeaderLines val="1"/>
+        </c:dLbls>
+      </c:pie3DChart>
+      <c:spPr>
+        <a:noFill/>
+        <a:ln>
+          <a:noFill/>
+        </a:ln>
+        <a:effectLst/>
+      </c:spPr>
+    </c:plotArea>
+    <c:legend>
+      <c:legendPos val="b"/>
+      <c:overlay val="0"/>
+      <c:spPr>
+        <a:noFill/>
+        <a:ln>
+          <a:noFill/>
+        </a:ln>
+        <a:effectLst/>
+      </c:spPr>
+      <c:txPr>
+        <a:bodyPr rot="0" spcFirstLastPara="1" vertOverflow="ellipsis" vert="horz" wrap="square" anchor="ctr" anchorCtr="1"/>
+        <a:lstStyle/>
+        <a:p>
+          <a:pPr>
+            <a:defRPr sz="1197" b="0" i="0" u="none" strike="noStrike" kern="1200" baseline="0">
+              <a:solidFill>
+                <a:schemeClr val="tx1">
+                  <a:lumMod val="65000"/>
+                  <a:lumOff val="35000"/>
+                </a:schemeClr>
+              </a:solidFill>
+              <a:latin typeface="+mn-lt"/>
+              <a:ea typeface="+mn-ea"/>
+              <a:cs typeface="+mn-cs"/>
+            </a:defRPr>
+          </a:pPr>
+          <a:endParaRPr lang="en-US"/>
+        </a:p>
+      </c:txPr>
+    </c:legend>
+    <c:plotVisOnly val="1"/>
+    <c:dispBlanksAs val="gap"/>
+    <c:showDLblsOverMax val="0"/>
+    <c:extLst>
+      <c:ext xmlns:c16r3="http://schemas.microsoft.com/office/drawing/2017/03/chart" uri="{56B9EC1D-385E-4148-901F-78D8002777C0}">
+        <c16r3:dataDisplayOptions16>
+          <c16r3:dispNaAsBlank val="1"/>
+        </c16r3:dataDisplayOptions16>
+      </c:ext>
+    </c:extLst>
+  </c:chart>
+  <c:spPr>
+    <a:noFill/>
+    <a:ln>
+      <a:noFill/>
+    </a:ln>
+    <a:effectLst/>
+  </c:spPr>
+  <c:txPr>
+    <a:bodyPr/>
+    <a:lstStyle/>
+    <a:p>
+      <a:pPr>
+        <a:defRPr/>
+      </a:pPr>
+      <a:endParaRPr lang="en-US"/>
+    </a:p>
+  </c:txPr>
+  <c:externalData r:id="rId3">
+    <c:autoUpdate val="0"/>
+  </c:externalData>
+</c:chartSpace>
+</file>
+
+<file path=ppt/charts/colors1.xml><?xml version="1.0" encoding="utf-8"?>
+<cs:colorStyle xmlns:cs="http://schemas.microsoft.com/office/drawing/2012/chartStyle" xmlns:a="http://schemas.openxmlformats.org/drawingml/2006/main" meth="cycle" id="10">
+  <a:schemeClr val="accent1"/>
+  <a:schemeClr val="accent2"/>
+  <a:schemeClr val="accent3"/>
+  <a:schemeClr val="accent4"/>
+  <a:schemeClr val="accent5"/>
+  <a:schemeClr val="accent6"/>
+  <cs:variation/>
+  <cs:variation>
+    <a:lumMod val="60000"/>
+  </cs:variation>
+  <cs:variation>
+    <a:lumMod val="80000"/>
+    <a:lumOff val="20000"/>
+  </cs:variation>
+  <cs:variation>
+    <a:lumMod val="80000"/>
+  </cs:variation>
+  <cs:variation>
+    <a:lumMod val="60000"/>
+    <a:lumOff val="40000"/>
+  </cs:variation>
+  <cs:variation>
+    <a:lumMod val="50000"/>
+  </cs:variation>
+  <cs:variation>
+    <a:lumMod val="70000"/>
+    <a:lumOff val="30000"/>
+  </cs:variation>
+  <cs:variation>
+    <a:lumMod val="70000"/>
+  </cs:variation>
+  <cs:variation>
+    <a:lumMod val="50000"/>
+    <a:lumOff val="50000"/>
+  </cs:variation>
+</cs:colorStyle>
+</file>
+
+<file path=ppt/charts/colors2.xml><?xml version="1.0" encoding="utf-8"?>
+<cs:colorStyle xmlns:cs="http://schemas.microsoft.com/office/drawing/2012/chartStyle" xmlns:a="http://schemas.openxmlformats.org/drawingml/2006/main" meth="cycle" id="10">
+  <a:schemeClr val="accent1"/>
+  <a:schemeClr val="accent2"/>
+  <a:schemeClr val="accent3"/>
+  <a:schemeClr val="accent4"/>
+  <a:schemeClr val="accent5"/>
+  <a:schemeClr val="accent6"/>
+  <cs:variation/>
+  <cs:variation>
+    <a:lumMod val="60000"/>
+  </cs:variation>
+  <cs:variation>
+    <a:lumMod val="80000"/>
+    <a:lumOff val="20000"/>
+  </cs:variation>
+  <cs:variation>
+    <a:lumMod val="80000"/>
+  </cs:variation>
+  <cs:variation>
+    <a:lumMod val="60000"/>
+    <a:lumOff val="40000"/>
+  </cs:variation>
+  <cs:variation>
+    <a:lumMod val="50000"/>
+  </cs:variation>
+  <cs:variation>
+    <a:lumMod val="70000"/>
+    <a:lumOff val="30000"/>
+  </cs:variation>
+  <cs:variation>
+    <a:lumMod val="70000"/>
+  </cs:variation>
+  <cs:variation>
+    <a:lumMod val="50000"/>
+    <a:lumOff val="50000"/>
+  </cs:variation>
+</cs:colorStyle>
+</file>
+
+<file path=ppt/charts/style1.xml><?xml version="1.0" encoding="utf-8"?>
+<cs:chartStyle xmlns:cs="http://schemas.microsoft.com/office/drawing/2012/chartStyle" xmlns:a="http://schemas.openxmlformats.org/drawingml/2006/main" id="262">
+  <cs:axisTitle>
+    <cs:lnRef idx="0"/>
+    <cs:fillRef idx="0"/>
+    <cs:effectRef idx="0"/>
+    <cs:fontRef idx="minor">
+      <a:schemeClr val="tx1">
+        <a:lumMod val="65000"/>
+        <a:lumOff val="35000"/>
+      </a:schemeClr>
+    </cs:fontRef>
+    <cs:defRPr sz="1330" kern="1200"/>
+  </cs:axisTitle>
+  <cs:categoryAxis>
+    <cs:lnRef idx="0"/>
+    <cs:fillRef idx="0"/>
+    <cs:effectRef idx="0"/>
+    <cs:fontRef idx="minor">
+      <a:schemeClr val="tx1">
+        <a:lumMod val="65000"/>
+        <a:lumOff val="35000"/>
+      </a:schemeClr>
+    </cs:fontRef>
+    <cs:spPr>
+      <a:ln w="9525" cap="flat" cmpd="sng" algn="ctr">
+        <a:solidFill>
+          <a:schemeClr val="tx1">
+            <a:lumMod val="15000"/>
+            <a:lumOff val="85000"/>
+          </a:schemeClr>
+        </a:solidFill>
+        <a:round/>
+      </a:ln>
+    </cs:spPr>
+    <cs:defRPr sz="1197" kern="1200"/>
+  </cs:categoryAxis>
+  <cs:chartArea mods="allowNoFillOverride allowNoLineOverride">
+    <cs:lnRef idx="0"/>
+    <cs:fillRef idx="0"/>
+    <cs:effectRef idx="0"/>
+    <cs:fontRef idx="minor">
+      <a:schemeClr val="tx1"/>
+    </cs:fontRef>
+    <cs:spPr>
+      <a:solidFill>
+        <a:schemeClr val="bg1"/>
+      </a:solidFill>
+      <a:ln w="9525" cap="flat" cmpd="sng" algn="ctr">
+        <a:solidFill>
+          <a:schemeClr val="tx1">
+            <a:lumMod val="15000"/>
+            <a:lumOff val="85000"/>
+          </a:schemeClr>
+        </a:solidFill>
+        <a:round/>
+      </a:ln>
+    </cs:spPr>
+    <cs:defRPr sz="1197" kern="1200"/>
+  </cs:chartArea>
+  <cs:dataLabel>
+    <cs:lnRef idx="0"/>
+    <cs:fillRef idx="0"/>
+    <cs:effectRef idx="0"/>
+    <cs:fontRef idx="minor">
+      <a:schemeClr val="tx1">
+        <a:lumMod val="75000"/>
+        <a:lumOff val="25000"/>
+      </a:schemeClr>
+    </cs:fontRef>
+    <cs:defRPr sz="1197" kern="1200"/>
+  </cs:dataLabel>
+  <cs:dataLabelCallout>
+    <cs:lnRef idx="0"/>
+    <cs:fillRef idx="0"/>
+    <cs:effectRef idx="0"/>
+    <cs:fontRef idx="minor">
+      <a:schemeClr val="dk1">
+        <a:lumMod val="65000"/>
+        <a:lumOff val="35000"/>
+      </a:schemeClr>
+    </cs:fontRef>
+    <cs:spPr>
+      <a:solidFill>
+        <a:schemeClr val="lt1"/>
+      </a:solidFill>
+      <a:ln>
+        <a:solidFill>
+          <a:schemeClr val="dk1">
+            <a:lumMod val="25000"/>
+            <a:lumOff val="75000"/>
+          </a:schemeClr>
+        </a:solidFill>
+      </a:ln>
+    </cs:spPr>
+    <cs:defRPr sz="1197" kern="1200"/>
+    <cs:bodyPr rot="0" spcFirstLastPara="1" vertOverflow="clip" horzOverflow="clip" vert="horz" wrap="square" lIns="36576" tIns="18288" rIns="36576" bIns="18288" anchor="ctr" anchorCtr="1">
+      <a:spAutoFit/>
+    </cs:bodyPr>
+  </cs:dataLabelCallout>
+  <cs:dataPoint>
+    <cs:lnRef idx="0"/>
+    <cs:fillRef idx="1">
+      <cs:styleClr val="auto"/>
+    </cs:fillRef>
+    <cs:effectRef idx="0"/>
+    <cs:fontRef idx="minor">
+      <a:schemeClr val="tx1"/>
+    </cs:fontRef>
+    <cs:spPr>
+      <a:ln w="19050">
+        <a:solidFill>
+          <a:schemeClr val="lt1"/>
+        </a:solidFill>
+      </a:ln>
+    </cs:spPr>
+  </cs:dataPoint>
+  <cs:dataPoint3D>
+    <cs:lnRef idx="0"/>
+    <cs:fillRef idx="1">
+      <cs:styleClr val="auto"/>
+    </cs:fillRef>
+    <cs:effectRef idx="0"/>
+    <cs:fontRef idx="minor">
+      <a:schemeClr val="tx1"/>
+    </cs:fontRef>
+    <cs:spPr>
+      <a:ln w="25400">
+        <a:solidFill>
+          <a:schemeClr val="lt1"/>
+        </a:solidFill>
+      </a:ln>
+    </cs:spPr>
+  </cs:dataPoint3D>
+  <cs:dataPointLine>
+    <cs:lnRef idx="0">
+      <cs:styleClr val="auto"/>
+    </cs:lnRef>
+    <cs:fillRef idx="0"/>
+    <cs:effectRef idx="0"/>
+    <cs:fontRef idx="minor">
+      <a:schemeClr val="tx1"/>
+    </cs:fontRef>
+    <cs:spPr>
+      <a:ln w="28575" cap="rnd">
+        <a:solidFill>
+          <a:schemeClr val="phClr"/>
+        </a:solidFill>
+        <a:round/>
+      </a:ln>
+    </cs:spPr>
+  </cs:dataPointLine>
+  <cs:dataPointMarker>
+    <cs:lnRef idx="0">
+      <cs:styleClr val="auto"/>
+    </cs:lnRef>
+    <cs:fillRef idx="1">
+      <cs:styleClr val="auto"/>
+    </cs:fillRef>
+    <cs:effectRef idx="0"/>
+    <cs:fontRef idx="minor">
+      <a:schemeClr val="tx1"/>
+    </cs:fontRef>
+    <cs:spPr>
+      <a:ln w="9525">
+        <a:solidFill>
+          <a:schemeClr val="phClr"/>
+        </a:solidFill>
+      </a:ln>
+    </cs:spPr>
+  </cs:dataPointMarker>
+  <cs:dataPointMarkerLayout symbol="circle" size="5"/>
+  <cs:dataPointWireframe>
+    <cs:lnRef idx="0">
+      <cs:styleClr val="auto"/>
+    </cs:lnRef>
+    <cs:fillRef idx="0"/>
+    <cs:effectRef idx="0"/>
+    <cs:fontRef idx="minor">
+      <a:schemeClr val="tx1"/>
+    </cs:fontRef>
+    <cs:spPr>
+      <a:ln w="9525" cap="rnd">
+        <a:solidFill>
+          <a:schemeClr val="phClr"/>
+        </a:solidFill>
+        <a:round/>
+      </a:ln>
+    </cs:spPr>
+  </cs:dataPointWireframe>
+  <cs:dataTable>
+    <cs:lnRef idx="0"/>
+    <cs:fillRef idx="0"/>
+    <cs:effectRef idx="0"/>
+    <cs:fontRef idx="minor">
+      <a:schemeClr val="tx1">
+        <a:lumMod val="65000"/>
+        <a:lumOff val="35000"/>
+      </a:schemeClr>
+    </cs:fontRef>
+    <cs:spPr>
+      <a:noFill/>
+      <a:ln w="9525" cap="flat" cmpd="sng" algn="ctr">
+        <a:solidFill>
+          <a:schemeClr val="tx1">
+            <a:lumMod val="15000"/>
+            <a:lumOff val="85000"/>
+          </a:schemeClr>
+        </a:solidFill>
+        <a:round/>
+      </a:ln>
+    </cs:spPr>
+    <cs:defRPr sz="1197" kern="1200"/>
+  </cs:dataTable>
+  <cs:downBar>
+    <cs:lnRef idx="0"/>
+    <cs:fillRef idx="0"/>
+    <cs:effectRef idx="0"/>
+    <cs:fontRef idx="minor">
+      <a:schemeClr val="tx1"/>
+    </cs:fontRef>
+    <cs:spPr>
+      <a:solidFill>
+        <a:schemeClr val="dk1">
+          <a:lumMod val="75000"/>
+          <a:lumOff val="25000"/>
+        </a:schemeClr>
+      </a:solidFill>
+      <a:ln w="9525" cap="flat" cmpd="sng" algn="ctr">
+        <a:solidFill>
+          <a:schemeClr val="tx1">
+            <a:lumMod val="65000"/>
+            <a:lumOff val="35000"/>
+          </a:schemeClr>
+        </a:solidFill>
+        <a:round/>
+      </a:ln>
+    </cs:spPr>
+  </cs:downBar>
+  <cs:dropLine>
+    <cs:lnRef idx="0"/>
+    <cs:fillRef idx="0"/>
+    <cs:effectRef idx="0"/>
+    <cs:fontRef idx="minor">
+      <a:schemeClr val="tx1"/>
+    </cs:fontRef>
+    <cs:spPr>
+      <a:ln w="9525" cap="flat" cmpd="sng" algn="ctr">
+        <a:solidFill>
+          <a:schemeClr val="tx1">
+            <a:lumMod val="35000"/>
+            <a:lumOff val="65000"/>
+          </a:schemeClr>
+        </a:solidFill>
+        <a:round/>
+      </a:ln>
+    </cs:spPr>
+  </cs:dropLine>
+  <cs:errorBar>
+    <cs:lnRef idx="0"/>
+    <cs:fillRef idx="0"/>
+    <cs:effectRef idx="0"/>
+    <cs:fontRef idx="minor">
+      <a:schemeClr val="tx1"/>
+    </cs:fontRef>
+    <cs:spPr>
+      <a:ln w="9525" cap="flat" cmpd="sng" algn="ctr">
+        <a:solidFill>
+          <a:schemeClr val="tx1">
+            <a:lumMod val="65000"/>
+            <a:lumOff val="35000"/>
+          </a:schemeClr>
+        </a:solidFill>
+        <a:round/>
+      </a:ln>
+    </cs:spPr>
+  </cs:errorBar>
+  <cs:floor>
+    <cs:lnRef idx="0"/>
+    <cs:fillRef idx="0"/>
+    <cs:effectRef idx="0"/>
+    <cs:fontRef idx="minor">
+      <a:schemeClr val="tx1"/>
+    </cs:fontRef>
+    <cs:spPr>
+      <a:noFill/>
+      <a:ln>
+        <a:noFill/>
+      </a:ln>
+    </cs:spPr>
+  </cs:floor>
+  <cs:gridlineMajor>
+    <cs:lnRef idx="0"/>
+    <cs:fillRef idx="0"/>
+    <cs:effectRef idx="0"/>
+    <cs:fontRef idx="minor">
+      <a:schemeClr val="tx1"/>
+    </cs:fontRef>
+    <cs:spPr>
+      <a:ln w="9525" cap="flat" cmpd="sng" algn="ctr">
+        <a:solidFill>
+          <a:schemeClr val="tx1">
+            <a:lumMod val="15000"/>
+            <a:lumOff val="85000"/>
+          </a:schemeClr>
+        </a:solidFill>
+        <a:round/>
+      </a:ln>
+    </cs:spPr>
+  </cs:gridlineMajor>
+  <cs:gridlineMinor>
+    <cs:lnRef idx="0"/>
+    <cs:fillRef idx="0"/>
+    <cs:effectRef idx="0"/>
+    <cs:fontRef idx="minor">
+      <a:schemeClr val="tx1"/>
+    </cs:fontRef>
+    <cs:spPr>
+      <a:ln w="9525" cap="flat" cmpd="sng" algn="ctr">
+        <a:solidFill>
+          <a:schemeClr val="tx1">
+            <a:lumMod val="5000"/>
+            <a:lumOff val="95000"/>
+          </a:schemeClr>
+        </a:solidFill>
+        <a:round/>
+      </a:ln>
+    </cs:spPr>
+  </cs:gridlineMinor>
+  <cs:hiLoLine>
+    <cs:lnRef idx="0"/>
+    <cs:fillRef idx="0"/>
+    <cs:effectRef idx="0"/>
+    <cs:fontRef idx="minor">
+      <a:schemeClr val="tx1"/>
+    </cs:fontRef>
+    <cs:spPr>
+      <a:ln w="9525" cap="flat" cmpd="sng" algn="ctr">
+        <a:solidFill>
+          <a:schemeClr val="tx1">
+            <a:lumMod val="50000"/>
+            <a:lumOff val="50000"/>
+          </a:schemeClr>
+        </a:solidFill>
+        <a:round/>
+      </a:ln>
+    </cs:spPr>
+  </cs:hiLoLine>
+  <cs:leaderLine>
+    <cs:lnRef idx="0"/>
+    <cs:fillRef idx="0"/>
+    <cs:effectRef idx="0"/>
+    <cs:fontRef idx="minor">
+      <a:schemeClr val="tx1"/>
+    </cs:fontRef>
+    <cs:spPr>
+      <a:ln w="9525" cap="flat" cmpd="sng" algn="ctr">
+        <a:solidFill>
+          <a:schemeClr val="tx1">
+            <a:lumMod val="35000"/>
+            <a:lumOff val="65000"/>
+          </a:schemeClr>
+        </a:solidFill>
+        <a:round/>
+      </a:ln>
+    </cs:spPr>
+  </cs:leaderLine>
+  <cs:legend>
+    <cs:lnRef idx="0"/>
+    <cs:fillRef idx="0"/>
+    <cs:effectRef idx="0"/>
+    <cs:fontRef idx="minor">
+      <a:schemeClr val="tx1">
+        <a:lumMod val="65000"/>
+        <a:lumOff val="35000"/>
+      </a:schemeClr>
+    </cs:fontRef>
+    <cs:defRPr sz="1197" kern="1200"/>
+  </cs:legend>
+  <cs:plotArea mods="allowNoFillOverride allowNoLineOverride">
+    <cs:lnRef idx="0"/>
+    <cs:fillRef idx="0"/>
+    <cs:effectRef idx="0"/>
+    <cs:fontRef idx="minor">
+      <a:schemeClr val="tx1"/>
+    </cs:fontRef>
+  </cs:plotArea>
+  <cs:plotArea3D mods="allowNoFillOverride allowNoLineOverride">
+    <cs:lnRef idx="0"/>
+    <cs:fillRef idx="0"/>
+    <cs:effectRef idx="0"/>
+    <cs:fontRef idx="minor">
+      <a:schemeClr val="tx1"/>
+    </cs:fontRef>
+  </cs:plotArea3D>
+  <cs:seriesAxis>
+    <cs:lnRef idx="0"/>
+    <cs:fillRef idx="0"/>
+    <cs:effectRef idx="0"/>
+    <cs:fontRef idx="minor">
+      <a:schemeClr val="tx1">
+        <a:lumMod val="65000"/>
+        <a:lumOff val="35000"/>
+      </a:schemeClr>
+    </cs:fontRef>
+    <cs:defRPr sz="1197" kern="1200"/>
+  </cs:seriesAxis>
+  <cs:seriesLine>
+    <cs:lnRef idx="0"/>
+    <cs:fillRef idx="0"/>
+    <cs:effectRef idx="0"/>
+    <cs:fontRef idx="minor">
+      <a:schemeClr val="tx1"/>
+    </cs:fontRef>
+    <cs:spPr>
+      <a:ln w="9525" cap="flat" cmpd="sng" algn="ctr">
+        <a:solidFill>
+          <a:schemeClr val="tx1">
+            <a:lumMod val="35000"/>
+            <a:lumOff val="65000"/>
+          </a:schemeClr>
+        </a:solidFill>
+        <a:round/>
+      </a:ln>
+    </cs:spPr>
+  </cs:seriesLine>
+  <cs:title>
+    <cs:lnRef idx="0"/>
+    <cs:fillRef idx="0"/>
+    <cs:effectRef idx="0"/>
+    <cs:fontRef idx="minor">
+      <a:schemeClr val="tx1">
+        <a:lumMod val="65000"/>
+        <a:lumOff val="35000"/>
+      </a:schemeClr>
+    </cs:fontRef>
+    <cs:defRPr sz="1862" b="0" kern="1200" spc="0" baseline="0"/>
+  </cs:title>
+  <cs:trendline>
+    <cs:lnRef idx="0">
+      <cs:styleClr val="auto"/>
+    </cs:lnRef>
+    <cs:fillRef idx="0"/>
+    <cs:effectRef idx="0"/>
+    <cs:fontRef idx="minor">
+      <a:schemeClr val="tx1"/>
+    </cs:fontRef>
+    <cs:spPr>
+      <a:ln w="19050" cap="rnd">
+        <a:solidFill>
+          <a:schemeClr val="phClr"/>
+        </a:solidFill>
+        <a:prstDash val="sysDot"/>
+      </a:ln>
+    </cs:spPr>
+  </cs:trendline>
+  <cs:trendlineLabel>
+    <cs:lnRef idx="0"/>
+    <cs:fillRef idx="0"/>
+    <cs:effectRef idx="0"/>
+    <cs:fontRef idx="minor">
+      <a:schemeClr val="tx1">
+        <a:lumMod val="65000"/>
+        <a:lumOff val="35000"/>
+      </a:schemeClr>
+    </cs:fontRef>
+    <cs:defRPr sz="1197" kern="1200"/>
+  </cs:trendlineLabel>
+  <cs:upBar>
+    <cs:lnRef idx="0"/>
+    <cs:fillRef idx="0"/>
+    <cs:effectRef idx="0"/>
+    <cs:fontRef idx="minor">
+      <a:schemeClr val="tx1"/>
+    </cs:fontRef>
+    <cs:spPr>
+      <a:solidFill>
+        <a:schemeClr val="lt1"/>
+      </a:solidFill>
+      <a:ln w="9525" cap="flat" cmpd="sng" algn="ctr">
+        <a:solidFill>
+          <a:schemeClr val="tx1">
+            <a:lumMod val="65000"/>
+            <a:lumOff val="35000"/>
+          </a:schemeClr>
+        </a:solidFill>
+        <a:round/>
+      </a:ln>
+    </cs:spPr>
+  </cs:upBar>
+  <cs:valueAxis>
+    <cs:lnRef idx="0"/>
+    <cs:fillRef idx="0"/>
+    <cs:effectRef idx="0"/>
+    <cs:fontRef idx="minor">
+      <a:schemeClr val="tx1">
+        <a:lumMod val="65000"/>
+        <a:lumOff val="35000"/>
+      </a:schemeClr>
+    </cs:fontRef>
+    <cs:defRPr sz="1197" kern="1200"/>
+  </cs:valueAxis>
+  <cs:wall>
+    <cs:lnRef idx="0"/>
+    <cs:fillRef idx="0"/>
+    <cs:effectRef idx="0"/>
+    <cs:fontRef idx="minor">
+      <a:schemeClr val="tx1"/>
+    </cs:fontRef>
+    <cs:spPr>
+      <a:noFill/>
+      <a:ln>
+        <a:noFill/>
+      </a:ln>
+    </cs:spPr>
+  </cs:wall>
+</cs:chartStyle>
+</file>
+
+<file path=ppt/charts/style2.xml><?xml version="1.0" encoding="utf-8"?>
+<cs:chartStyle xmlns:cs="http://schemas.microsoft.com/office/drawing/2012/chartStyle" xmlns:a="http://schemas.openxmlformats.org/drawingml/2006/main" id="262">
+  <cs:axisTitle>
+    <cs:lnRef idx="0"/>
+    <cs:fillRef idx="0"/>
+    <cs:effectRef idx="0"/>
+    <cs:fontRef idx="minor">
+      <a:schemeClr val="tx1">
+        <a:lumMod val="65000"/>
+        <a:lumOff val="35000"/>
+      </a:schemeClr>
+    </cs:fontRef>
+    <cs:defRPr sz="1330" kern="1200"/>
+  </cs:axisTitle>
+  <cs:categoryAxis>
+    <cs:lnRef idx="0"/>
+    <cs:fillRef idx="0"/>
+    <cs:effectRef idx="0"/>
+    <cs:fontRef idx="minor">
+      <a:schemeClr val="tx1">
+        <a:lumMod val="65000"/>
+        <a:lumOff val="35000"/>
+      </a:schemeClr>
+    </cs:fontRef>
+    <cs:spPr>
+      <a:ln w="9525" cap="flat" cmpd="sng" algn="ctr">
+        <a:solidFill>
+          <a:schemeClr val="tx1">
+            <a:lumMod val="15000"/>
+            <a:lumOff val="85000"/>
+          </a:schemeClr>
+        </a:solidFill>
+        <a:round/>
+      </a:ln>
+    </cs:spPr>
+    <cs:defRPr sz="1197" kern="1200"/>
+  </cs:categoryAxis>
+  <cs:chartArea mods="allowNoFillOverride allowNoLineOverride">
+    <cs:lnRef idx="0"/>
+    <cs:fillRef idx="0"/>
+    <cs:effectRef idx="0"/>
+    <cs:fontRef idx="minor">
+      <a:schemeClr val="tx1"/>
+    </cs:fontRef>
+    <cs:spPr>
+      <a:solidFill>
+        <a:schemeClr val="bg1"/>
+      </a:solidFill>
+      <a:ln w="9525" cap="flat" cmpd="sng" algn="ctr">
+        <a:solidFill>
+          <a:schemeClr val="tx1">
+            <a:lumMod val="15000"/>
+            <a:lumOff val="85000"/>
+          </a:schemeClr>
+        </a:solidFill>
+        <a:round/>
+      </a:ln>
+    </cs:spPr>
+    <cs:defRPr sz="1197" kern="1200"/>
+  </cs:chartArea>
+  <cs:dataLabel>
+    <cs:lnRef idx="0"/>
+    <cs:fillRef idx="0"/>
+    <cs:effectRef idx="0"/>
+    <cs:fontRef idx="minor">
+      <a:schemeClr val="tx1">
+        <a:lumMod val="75000"/>
+        <a:lumOff val="25000"/>
+      </a:schemeClr>
+    </cs:fontRef>
+    <cs:defRPr sz="1197" kern="1200"/>
+  </cs:dataLabel>
+  <cs:dataLabelCallout>
+    <cs:lnRef idx="0"/>
+    <cs:fillRef idx="0"/>
+    <cs:effectRef idx="0"/>
+    <cs:fontRef idx="minor">
+      <a:schemeClr val="dk1">
+        <a:lumMod val="65000"/>
+        <a:lumOff val="35000"/>
+      </a:schemeClr>
+    </cs:fontRef>
+    <cs:spPr>
+      <a:solidFill>
+        <a:schemeClr val="lt1"/>
+      </a:solidFill>
+      <a:ln>
+        <a:solidFill>
+          <a:schemeClr val="dk1">
+            <a:lumMod val="25000"/>
+            <a:lumOff val="75000"/>
+          </a:schemeClr>
+        </a:solidFill>
+      </a:ln>
+    </cs:spPr>
+    <cs:defRPr sz="1197" kern="1200"/>
+    <cs:bodyPr rot="0" spcFirstLastPara="1" vertOverflow="clip" horzOverflow="clip" vert="horz" wrap="square" lIns="36576" tIns="18288" rIns="36576" bIns="18288" anchor="ctr" anchorCtr="1">
+      <a:spAutoFit/>
+    </cs:bodyPr>
+  </cs:dataLabelCallout>
+  <cs:dataPoint>
+    <cs:lnRef idx="0"/>
+    <cs:fillRef idx="1">
+      <cs:styleClr val="auto"/>
+    </cs:fillRef>
+    <cs:effectRef idx="0"/>
+    <cs:fontRef idx="minor">
+      <a:schemeClr val="tx1"/>
+    </cs:fontRef>
+    <cs:spPr>
+      <a:ln w="19050">
+        <a:solidFill>
+          <a:schemeClr val="lt1"/>
+        </a:solidFill>
+      </a:ln>
+    </cs:spPr>
+  </cs:dataPoint>
+  <cs:dataPoint3D>
+    <cs:lnRef idx="0"/>
+    <cs:fillRef idx="1">
+      <cs:styleClr val="auto"/>
+    </cs:fillRef>
+    <cs:effectRef idx="0"/>
+    <cs:fontRef idx="minor">
+      <a:schemeClr val="tx1"/>
+    </cs:fontRef>
+    <cs:spPr>
+      <a:ln w="25400">
+        <a:solidFill>
+          <a:schemeClr val="lt1"/>
+        </a:solidFill>
+      </a:ln>
+    </cs:spPr>
+  </cs:dataPoint3D>
+  <cs:dataPointLine>
+    <cs:lnRef idx="0">
+      <cs:styleClr val="auto"/>
+    </cs:lnRef>
+    <cs:fillRef idx="0"/>
+    <cs:effectRef idx="0"/>
+    <cs:fontRef idx="minor">
+      <a:schemeClr val="tx1"/>
+    </cs:fontRef>
+    <cs:spPr>
+      <a:ln w="28575" cap="rnd">
+        <a:solidFill>
+          <a:schemeClr val="phClr"/>
+        </a:solidFill>
+        <a:round/>
+      </a:ln>
+    </cs:spPr>
+  </cs:dataPointLine>
+  <cs:dataPointMarker>
+    <cs:lnRef idx="0">
+      <cs:styleClr val="auto"/>
+    </cs:lnRef>
+    <cs:fillRef idx="1">
+      <cs:styleClr val="auto"/>
+    </cs:fillRef>
+    <cs:effectRef idx="0"/>
+    <cs:fontRef idx="minor">
+      <a:schemeClr val="tx1"/>
+    </cs:fontRef>
+    <cs:spPr>
+      <a:ln w="9525">
+        <a:solidFill>
+          <a:schemeClr val="phClr"/>
+        </a:solidFill>
+      </a:ln>
+    </cs:spPr>
+  </cs:dataPointMarker>
+  <cs:dataPointMarkerLayout symbol="circle" size="5"/>
+  <cs:dataPointWireframe>
+    <cs:lnRef idx="0">
+      <cs:styleClr val="auto"/>
+    </cs:lnRef>
+    <cs:fillRef idx="0"/>
+    <cs:effectRef idx="0"/>
+    <cs:fontRef idx="minor">
+      <a:schemeClr val="tx1"/>
+    </cs:fontRef>
+    <cs:spPr>
+      <a:ln w="9525" cap="rnd">
+        <a:solidFill>
+          <a:schemeClr val="phClr"/>
+        </a:solidFill>
+        <a:round/>
+      </a:ln>
+    </cs:spPr>
+  </cs:dataPointWireframe>
+  <cs:dataTable>
+    <cs:lnRef idx="0"/>
+    <cs:fillRef idx="0"/>
+    <cs:effectRef idx="0"/>
+    <cs:fontRef idx="minor">
+      <a:schemeClr val="tx1">
+        <a:lumMod val="65000"/>
+        <a:lumOff val="35000"/>
+      </a:schemeClr>
+    </cs:fontRef>
+    <cs:spPr>
+      <a:noFill/>
+      <a:ln w="9525" cap="flat" cmpd="sng" algn="ctr">
+        <a:solidFill>
+          <a:schemeClr val="tx1">
+            <a:lumMod val="15000"/>
+            <a:lumOff val="85000"/>
+          </a:schemeClr>
+        </a:solidFill>
+        <a:round/>
+      </a:ln>
+    </cs:spPr>
+    <cs:defRPr sz="1197" kern="1200"/>
+  </cs:dataTable>
+  <cs:downBar>
+    <cs:lnRef idx="0"/>
+    <cs:fillRef idx="0"/>
+    <cs:effectRef idx="0"/>
+    <cs:fontRef idx="minor">
+      <a:schemeClr val="tx1"/>
+    </cs:fontRef>
+    <cs:spPr>
+      <a:solidFill>
+        <a:schemeClr val="dk1">
+          <a:lumMod val="75000"/>
+          <a:lumOff val="25000"/>
+        </a:schemeClr>
+      </a:solidFill>
+      <a:ln w="9525" cap="flat" cmpd="sng" algn="ctr">
+        <a:solidFill>
+          <a:schemeClr val="tx1">
+            <a:lumMod val="65000"/>
+            <a:lumOff val="35000"/>
+          </a:schemeClr>
+        </a:solidFill>
+        <a:round/>
+      </a:ln>
+    </cs:spPr>
+  </cs:downBar>
+  <cs:dropLine>
+    <cs:lnRef idx="0"/>
+    <cs:fillRef idx="0"/>
+    <cs:effectRef idx="0"/>
+    <cs:fontRef idx="minor">
+      <a:schemeClr val="tx1"/>
+    </cs:fontRef>
+    <cs:spPr>
+      <a:ln w="9525" cap="flat" cmpd="sng" algn="ctr">
+        <a:solidFill>
+          <a:schemeClr val="tx1">
+            <a:lumMod val="35000"/>
+            <a:lumOff val="65000"/>
+          </a:schemeClr>
+        </a:solidFill>
+        <a:round/>
+      </a:ln>
+    </cs:spPr>
+  </cs:dropLine>
+  <cs:errorBar>
+    <cs:lnRef idx="0"/>
+    <cs:fillRef idx="0"/>
+    <cs:effectRef idx="0"/>
+    <cs:fontRef idx="minor">
+      <a:schemeClr val="tx1"/>
+    </cs:fontRef>
+    <cs:spPr>
+      <a:ln w="9525" cap="flat" cmpd="sng" algn="ctr">
+        <a:solidFill>
+          <a:schemeClr val="tx1">
+            <a:lumMod val="65000"/>
+            <a:lumOff val="35000"/>
+          </a:schemeClr>
+        </a:solidFill>
+        <a:round/>
+      </a:ln>
+    </cs:spPr>
+  </cs:errorBar>
+  <cs:floor>
+    <cs:lnRef idx="0"/>
+    <cs:fillRef idx="0"/>
+    <cs:effectRef idx="0"/>
+    <cs:fontRef idx="minor">
+      <a:schemeClr val="tx1"/>
+    </cs:fontRef>
+    <cs:spPr>
+      <a:noFill/>
+      <a:ln>
+        <a:noFill/>
+      </a:ln>
+    </cs:spPr>
+  </cs:floor>
+  <cs:gridlineMajor>
+    <cs:lnRef idx="0"/>
+    <cs:fillRef idx="0"/>
+    <cs:effectRef idx="0"/>
+    <cs:fontRef idx="minor">
+      <a:schemeClr val="tx1"/>
+    </cs:fontRef>
+    <cs:spPr>
+      <a:ln w="9525" cap="flat" cmpd="sng" algn="ctr">
+        <a:solidFill>
+          <a:schemeClr val="tx1">
+            <a:lumMod val="15000"/>
+            <a:lumOff val="85000"/>
+          </a:schemeClr>
+        </a:solidFill>
+        <a:round/>
+      </a:ln>
+    </cs:spPr>
+  </cs:gridlineMajor>
+  <cs:gridlineMinor>
+    <cs:lnRef idx="0"/>
+    <cs:fillRef idx="0"/>
+    <cs:effectRef idx="0"/>
+    <cs:fontRef idx="minor">
+      <a:schemeClr val="tx1"/>
+    </cs:fontRef>
+    <cs:spPr>
+      <a:ln w="9525" cap="flat" cmpd="sng" algn="ctr">
+        <a:solidFill>
+          <a:schemeClr val="tx1">
+            <a:lumMod val="5000"/>
+            <a:lumOff val="95000"/>
+          </a:schemeClr>
+        </a:solidFill>
+        <a:round/>
+      </a:ln>
+    </cs:spPr>
+  </cs:gridlineMinor>
+  <cs:hiLoLine>
+    <cs:lnRef idx="0"/>
+    <cs:fillRef idx="0"/>
+    <cs:effectRef idx="0"/>
+    <cs:fontRef idx="minor">
+      <a:schemeClr val="tx1"/>
+    </cs:fontRef>
+    <cs:spPr>
+      <a:ln w="9525" cap="flat" cmpd="sng" algn="ctr">
+        <a:solidFill>
+          <a:schemeClr val="tx1">
+            <a:lumMod val="50000"/>
+            <a:lumOff val="50000"/>
+          </a:schemeClr>
+        </a:solidFill>
+        <a:round/>
+      </a:ln>
+    </cs:spPr>
+  </cs:hiLoLine>
+  <cs:leaderLine>
+    <cs:lnRef idx="0"/>
+    <cs:fillRef idx="0"/>
+    <cs:effectRef idx="0"/>
+    <cs:fontRef idx="minor">
+      <a:schemeClr val="tx1"/>
+    </cs:fontRef>
+    <cs:spPr>
+      <a:ln w="9525" cap="flat" cmpd="sng" algn="ctr">
+        <a:solidFill>
+          <a:schemeClr val="tx1">
+            <a:lumMod val="35000"/>
+            <a:lumOff val="65000"/>
+          </a:schemeClr>
+        </a:solidFill>
+        <a:round/>
+      </a:ln>
+    </cs:spPr>
+  </cs:leaderLine>
+  <cs:legend>
+    <cs:lnRef idx="0"/>
+    <cs:fillRef idx="0"/>
+    <cs:effectRef idx="0"/>
+    <cs:fontRef idx="minor">
+      <a:schemeClr val="tx1">
+        <a:lumMod val="65000"/>
+        <a:lumOff val="35000"/>
+      </a:schemeClr>
+    </cs:fontRef>
+    <cs:defRPr sz="1197" kern="1200"/>
+  </cs:legend>
+  <cs:plotArea mods="allowNoFillOverride allowNoLineOverride">
+    <cs:lnRef idx="0"/>
+    <cs:fillRef idx="0"/>
+    <cs:effectRef idx="0"/>
+    <cs:fontRef idx="minor">
+      <a:schemeClr val="tx1"/>
+    </cs:fontRef>
+  </cs:plotArea>
+  <cs:plotArea3D mods="allowNoFillOverride allowNoLineOverride">
+    <cs:lnRef idx="0"/>
+    <cs:fillRef idx="0"/>
+    <cs:effectRef idx="0"/>
+    <cs:fontRef idx="minor">
+      <a:schemeClr val="tx1"/>
+    </cs:fontRef>
+  </cs:plotArea3D>
+  <cs:seriesAxis>
+    <cs:lnRef idx="0"/>
+    <cs:fillRef idx="0"/>
+    <cs:effectRef idx="0"/>
+    <cs:fontRef idx="minor">
+      <a:schemeClr val="tx1">
+        <a:lumMod val="65000"/>
+        <a:lumOff val="35000"/>
+      </a:schemeClr>
+    </cs:fontRef>
+    <cs:defRPr sz="1197" kern="1200"/>
+  </cs:seriesAxis>
+  <cs:seriesLine>
+    <cs:lnRef idx="0"/>
+    <cs:fillRef idx="0"/>
+    <cs:effectRef idx="0"/>
+    <cs:fontRef idx="minor">
+      <a:schemeClr val="tx1"/>
+    </cs:fontRef>
+    <cs:spPr>
+      <a:ln w="9525" cap="flat" cmpd="sng" algn="ctr">
+        <a:solidFill>
+          <a:schemeClr val="tx1">
+            <a:lumMod val="35000"/>
+            <a:lumOff val="65000"/>
+          </a:schemeClr>
+        </a:solidFill>
+        <a:round/>
+      </a:ln>
+    </cs:spPr>
+  </cs:seriesLine>
+  <cs:title>
+    <cs:lnRef idx="0"/>
+    <cs:fillRef idx="0"/>
+    <cs:effectRef idx="0"/>
+    <cs:fontRef idx="minor">
+      <a:schemeClr val="tx1">
+        <a:lumMod val="65000"/>
+        <a:lumOff val="35000"/>
+      </a:schemeClr>
+    </cs:fontRef>
+    <cs:defRPr sz="1862" b="0" kern="1200" spc="0" baseline="0"/>
+  </cs:title>
+  <cs:trendline>
+    <cs:lnRef idx="0">
+      <cs:styleClr val="auto"/>
+    </cs:lnRef>
+    <cs:fillRef idx="0"/>
+    <cs:effectRef idx="0"/>
+    <cs:fontRef idx="minor">
+      <a:schemeClr val="tx1"/>
+    </cs:fontRef>
+    <cs:spPr>
+      <a:ln w="19050" cap="rnd">
+        <a:solidFill>
+          <a:schemeClr val="phClr"/>
+        </a:solidFill>
+        <a:prstDash val="sysDot"/>
+      </a:ln>
+    </cs:spPr>
+  </cs:trendline>
+  <cs:trendlineLabel>
+    <cs:lnRef idx="0"/>
+    <cs:fillRef idx="0"/>
+    <cs:effectRef idx="0"/>
+    <cs:fontRef idx="minor">
+      <a:schemeClr val="tx1">
+        <a:lumMod val="65000"/>
+        <a:lumOff val="35000"/>
+      </a:schemeClr>
+    </cs:fontRef>
+    <cs:defRPr sz="1197" kern="1200"/>
+  </cs:trendlineLabel>
+  <cs:upBar>
+    <cs:lnRef idx="0"/>
+    <cs:fillRef idx="0"/>
+    <cs:effectRef idx="0"/>
+    <cs:fontRef idx="minor">
+      <a:schemeClr val="tx1"/>
+    </cs:fontRef>
+    <cs:spPr>
+      <a:solidFill>
+        <a:schemeClr val="lt1"/>
+      </a:solidFill>
+      <a:ln w="9525" cap="flat" cmpd="sng" algn="ctr">
+        <a:solidFill>
+          <a:schemeClr val="tx1">
+            <a:lumMod val="65000"/>
+            <a:lumOff val="35000"/>
+          </a:schemeClr>
+        </a:solidFill>
+        <a:round/>
+      </a:ln>
+    </cs:spPr>
+  </cs:upBar>
+  <cs:valueAxis>
+    <cs:lnRef idx="0"/>
+    <cs:fillRef idx="0"/>
+    <cs:effectRef idx="0"/>
+    <cs:fontRef idx="minor">
+      <a:schemeClr val="tx1">
+        <a:lumMod val="65000"/>
+        <a:lumOff val="35000"/>
+      </a:schemeClr>
+    </cs:fontRef>
+    <cs:defRPr sz="1197" kern="1200"/>
+  </cs:valueAxis>
+  <cs:wall>
+    <cs:lnRef idx="0"/>
+    <cs:fillRef idx="0"/>
+    <cs:effectRef idx="0"/>
+    <cs:fontRef idx="minor">
+      <a:schemeClr val="tx1"/>
+    </cs:fontRef>
+    <cs:spPr>
+      <a:noFill/>
+      <a:ln>
+        <a:noFill/>
+      </a:ln>
+    </cs:spPr>
+  </cs:wall>
+</cs:chartStyle>
+</file>
+
 <file path=ppt/slideLayouts/slideLayout1.xml><?xml version="1.0" encoding="utf-8"?>
 <p:sldLayout xmlns:a="http://schemas.openxmlformats.org/drawingml/2006/main" xmlns:r="http://schemas.openxmlformats.org/officeDocument/2006/relationships" xmlns:p="http://schemas.openxmlformats.org/presentationml/2006/main" type="title" preserve="1">
   <p:cSld name="Title Slide">
@@ -261,10 +2064,9 @@
           <a:lstStyle/>
           <a:p>
             <a:r>
-              <a:rPr lang="en-US" smtClean="0"/>
+              <a:rPr lang="en-US"/>
               <a:t>Click to edit Master title style</a:t>
             </a:r>
-            <a:endParaRPr lang="en-US"/>
           </a:p>
         </p:txBody>
       </p:sp>
@@ -380,10 +2182,9 @@
           </a:lstStyle>
           <a:p>
             <a:r>
-              <a:rPr lang="en-US" smtClean="0"/>
+              <a:rPr lang="en-US"/>
               <a:t>Click to edit Master subtitle style</a:t>
             </a:r>
-            <a:endParaRPr lang="en-US"/>
           </a:p>
         </p:txBody>
       </p:sp>
@@ -405,7 +2206,7 @@
             <a:fld id="{1D8BD707-D9CF-40AE-B4C6-C98DA3205C09}" type="datetimeFigureOut">
               <a:rPr lang="en-US" smtClean="0"/>
               <a:pPr/>
-              <a:t>9/1/2012</a:t>
+              <a:t>1/19/26</a:t>
             </a:fld>
             <a:endParaRPr lang="en-US"/>
           </a:p>
@@ -495,10 +2296,9 @@
           <a:lstStyle/>
           <a:p>
             <a:r>
-              <a:rPr lang="en-US" smtClean="0"/>
+              <a:rPr lang="en-US"/>
               <a:t>Click to edit Master title style</a:t>
             </a:r>
-            <a:endParaRPr lang="en-US"/>
           </a:p>
         </p:txBody>
       </p:sp>
@@ -519,38 +2319,37 @@
           <a:p>
             <a:pPr lvl="0"/>
             <a:r>
-              <a:rPr lang="en-US" smtClean="0"/>
+              <a:rPr lang="en-US"/>
               <a:t>Click to edit Master text styles</a:t>
             </a:r>
           </a:p>
           <a:p>
             <a:pPr lvl="1"/>
             <a:r>
-              <a:rPr lang="en-US" smtClean="0"/>
+              <a:rPr lang="en-US"/>
               <a:t>Second level</a:t>
             </a:r>
           </a:p>
           <a:p>
             <a:pPr lvl="2"/>
             <a:r>
-              <a:rPr lang="en-US" smtClean="0"/>
+              <a:rPr lang="en-US"/>
               <a:t>Third level</a:t>
             </a:r>
           </a:p>
           <a:p>
             <a:pPr lvl="3"/>
             <a:r>
-              <a:rPr lang="en-US" smtClean="0"/>
+              <a:rPr lang="en-US"/>
               <a:t>Fourth level</a:t>
             </a:r>
           </a:p>
           <a:p>
             <a:pPr lvl="4"/>
             <a:r>
-              <a:rPr lang="en-US" smtClean="0"/>
+              <a:rPr lang="en-US"/>
               <a:t>Fifth level</a:t>
             </a:r>
-            <a:endParaRPr lang="en-US"/>
           </a:p>
         </p:txBody>
       </p:sp>
@@ -572,7 +2371,7 @@
             <a:fld id="{1D8BD707-D9CF-40AE-B4C6-C98DA3205C09}" type="datetimeFigureOut">
               <a:rPr lang="en-US" smtClean="0"/>
               <a:pPr/>
-              <a:t>9/1/2012</a:t>
+              <a:t>1/19/26</a:t>
             </a:fld>
             <a:endParaRPr lang="en-US"/>
           </a:p>
@@ -667,10 +2466,9 @@
           <a:lstStyle/>
           <a:p>
             <a:r>
-              <a:rPr lang="en-US" smtClean="0"/>
+              <a:rPr lang="en-US"/>
               <a:t>Click to edit Master title style</a:t>
             </a:r>
-            <a:endParaRPr lang="en-US"/>
           </a:p>
         </p:txBody>
       </p:sp>
@@ -696,38 +2494,37 @@
           <a:p>
             <a:pPr lvl="0"/>
             <a:r>
-              <a:rPr lang="en-US" smtClean="0"/>
+              <a:rPr lang="en-US"/>
               <a:t>Click to edit Master text styles</a:t>
             </a:r>
           </a:p>
           <a:p>
             <a:pPr lvl="1"/>
             <a:r>
-              <a:rPr lang="en-US" smtClean="0"/>
+              <a:rPr lang="en-US"/>
               <a:t>Second level</a:t>
             </a:r>
           </a:p>
           <a:p>
             <a:pPr lvl="2"/>
             <a:r>
-              <a:rPr lang="en-US" smtClean="0"/>
+              <a:rPr lang="en-US"/>
               <a:t>Third level</a:t>
             </a:r>
           </a:p>
           <a:p>
             <a:pPr lvl="3"/>
             <a:r>
-              <a:rPr lang="en-US" smtClean="0"/>
+              <a:rPr lang="en-US"/>
               <a:t>Fourth level</a:t>
             </a:r>
           </a:p>
           <a:p>
             <a:pPr lvl="4"/>
             <a:r>
-              <a:rPr lang="en-US" smtClean="0"/>
+              <a:rPr lang="en-US"/>
               <a:t>Fifth level</a:t>
             </a:r>
-            <a:endParaRPr lang="en-US"/>
           </a:p>
         </p:txBody>
       </p:sp>
@@ -749,7 +2546,7 @@
             <a:fld id="{1D8BD707-D9CF-40AE-B4C6-C98DA3205C09}" type="datetimeFigureOut">
               <a:rPr lang="en-US" smtClean="0"/>
               <a:pPr/>
-              <a:t>9/1/2012</a:t>
+              <a:t>1/19/26</a:t>
             </a:fld>
             <a:endParaRPr lang="en-US"/>
           </a:p>
@@ -839,10 +2636,9 @@
           <a:lstStyle/>
           <a:p>
             <a:r>
-              <a:rPr lang="en-US" smtClean="0"/>
+              <a:rPr lang="en-US"/>
               <a:t>Click to edit Master title style</a:t>
             </a:r>
-            <a:endParaRPr lang="en-US"/>
           </a:p>
         </p:txBody>
       </p:sp>
@@ -863,38 +2659,37 @@
           <a:p>
             <a:pPr lvl="0"/>
             <a:r>
-              <a:rPr lang="en-US" smtClean="0"/>
+              <a:rPr lang="en-US"/>
               <a:t>Click to edit Master text styles</a:t>
             </a:r>
           </a:p>
           <a:p>
             <a:pPr lvl="1"/>
             <a:r>
-              <a:rPr lang="en-US" smtClean="0"/>
+              <a:rPr lang="en-US"/>
               <a:t>Second level</a:t>
             </a:r>
           </a:p>
           <a:p>
             <a:pPr lvl="2"/>
             <a:r>
-              <a:rPr lang="en-US" smtClean="0"/>
+              <a:rPr lang="en-US"/>
               <a:t>Third level</a:t>
             </a:r>
           </a:p>
           <a:p>
             <a:pPr lvl="3"/>
             <a:r>
-              <a:rPr lang="en-US" smtClean="0"/>
+              <a:rPr lang="en-US"/>
               <a:t>Fourth level</a:t>
             </a:r>
           </a:p>
           <a:p>
             <a:pPr lvl="4"/>
             <a:r>
-              <a:rPr lang="en-US" smtClean="0"/>
+              <a:rPr lang="en-US"/>
               <a:t>Fifth level</a:t>
             </a:r>
-            <a:endParaRPr lang="en-US"/>
           </a:p>
         </p:txBody>
       </p:sp>
@@ -916,7 +2711,7 @@
             <a:fld id="{1D8BD707-D9CF-40AE-B4C6-C98DA3205C09}" type="datetimeFigureOut">
               <a:rPr lang="en-US" smtClean="0"/>
               <a:pPr/>
-              <a:t>9/1/2012</a:t>
+              <a:t>1/19/26</a:t>
             </a:fld>
             <a:endParaRPr lang="en-US"/>
           </a:p>
@@ -1015,10 +2810,9 @@
           </a:lstStyle>
           <a:p>
             <a:r>
-              <a:rPr lang="en-US" smtClean="0"/>
+              <a:rPr lang="en-US"/>
               <a:t>Click to edit Master title style</a:t>
             </a:r>
-            <a:endParaRPr lang="en-US"/>
           </a:p>
         </p:txBody>
       </p:sp>
@@ -1135,7 +2929,7 @@
           <a:p>
             <a:pPr lvl="0"/>
             <a:r>
-              <a:rPr lang="en-US" smtClean="0"/>
+              <a:rPr lang="en-US"/>
               <a:t>Click to edit Master text styles</a:t>
             </a:r>
           </a:p>
@@ -1159,7 +2953,7 @@
             <a:fld id="{1D8BD707-D9CF-40AE-B4C6-C98DA3205C09}" type="datetimeFigureOut">
               <a:rPr lang="en-US" smtClean="0"/>
               <a:pPr/>
-              <a:t>9/1/2012</a:t>
+              <a:t>1/19/26</a:t>
             </a:fld>
             <a:endParaRPr lang="en-US"/>
           </a:p>
@@ -1249,10 +3043,9 @@
           <a:lstStyle/>
           <a:p>
             <a:r>
-              <a:rPr lang="en-US" smtClean="0"/>
+              <a:rPr lang="en-US"/>
               <a:t>Click to edit Master title style</a:t>
             </a:r>
-            <a:endParaRPr lang="en-US"/>
           </a:p>
         </p:txBody>
       </p:sp>
@@ -1306,38 +3099,37 @@
           <a:p>
             <a:pPr lvl="0"/>
             <a:r>
-              <a:rPr lang="en-US" smtClean="0"/>
+              <a:rPr lang="en-US"/>
               <a:t>Click to edit Master text styles</a:t>
             </a:r>
           </a:p>
           <a:p>
             <a:pPr lvl="1"/>
             <a:r>
-              <a:rPr lang="en-US" smtClean="0"/>
+              <a:rPr lang="en-US"/>
               <a:t>Second level</a:t>
             </a:r>
           </a:p>
           <a:p>
             <a:pPr lvl="2"/>
             <a:r>
-              <a:rPr lang="en-US" smtClean="0"/>
+              <a:rPr lang="en-US"/>
               <a:t>Third level</a:t>
             </a:r>
           </a:p>
           <a:p>
             <a:pPr lvl="3"/>
             <a:r>
-              <a:rPr lang="en-US" smtClean="0"/>
+              <a:rPr lang="en-US"/>
               <a:t>Fourth level</a:t>
             </a:r>
           </a:p>
           <a:p>
             <a:pPr lvl="4"/>
             <a:r>
-              <a:rPr lang="en-US" smtClean="0"/>
+              <a:rPr lang="en-US"/>
               <a:t>Fifth level</a:t>
             </a:r>
-            <a:endParaRPr lang="en-US"/>
           </a:p>
         </p:txBody>
       </p:sp>
@@ -1391,38 +3183,37 @@
           <a:p>
             <a:pPr lvl="0"/>
             <a:r>
-              <a:rPr lang="en-US" smtClean="0"/>
+              <a:rPr lang="en-US"/>
               <a:t>Click to edit Master text styles</a:t>
             </a:r>
           </a:p>
           <a:p>
             <a:pPr lvl="1"/>
             <a:r>
-              <a:rPr lang="en-US" smtClean="0"/>
+              <a:rPr lang="en-US"/>
               <a:t>Second level</a:t>
             </a:r>
           </a:p>
           <a:p>
             <a:pPr lvl="2"/>
             <a:r>
-              <a:rPr lang="en-US" smtClean="0"/>
+              <a:rPr lang="en-US"/>
               <a:t>Third level</a:t>
             </a:r>
           </a:p>
           <a:p>
             <a:pPr lvl="3"/>
             <a:r>
-              <a:rPr lang="en-US" smtClean="0"/>
+              <a:rPr lang="en-US"/>
               <a:t>Fourth level</a:t>
             </a:r>
           </a:p>
           <a:p>
             <a:pPr lvl="4"/>
             <a:r>
-              <a:rPr lang="en-US" smtClean="0"/>
+              <a:rPr lang="en-US"/>
               <a:t>Fifth level</a:t>
             </a:r>
-            <a:endParaRPr lang="en-US"/>
           </a:p>
         </p:txBody>
       </p:sp>
@@ -1444,7 +3235,7 @@
             <a:fld id="{1D8BD707-D9CF-40AE-B4C6-C98DA3205C09}" type="datetimeFigureOut">
               <a:rPr lang="en-US" smtClean="0"/>
               <a:pPr/>
-              <a:t>9/1/2012</a:t>
+              <a:t>1/19/26</a:t>
             </a:fld>
             <a:endParaRPr lang="en-US"/>
           </a:p>
@@ -1538,10 +3329,9 @@
           </a:lstStyle>
           <a:p>
             <a:r>
-              <a:rPr lang="en-US" smtClean="0"/>
+              <a:rPr lang="en-US"/>
               <a:t>Click to edit Master title style</a:t>
             </a:r>
-            <a:endParaRPr lang="en-US"/>
           </a:p>
         </p:txBody>
       </p:sp>
@@ -1604,7 +3394,7 @@
           <a:p>
             <a:pPr lvl="0"/>
             <a:r>
-              <a:rPr lang="en-US" smtClean="0"/>
+              <a:rPr lang="en-US"/>
               <a:t>Click to edit Master text styles</a:t>
             </a:r>
           </a:p>
@@ -1660,38 +3450,37 @@
           <a:p>
             <a:pPr lvl="0"/>
             <a:r>
-              <a:rPr lang="en-US" smtClean="0"/>
+              <a:rPr lang="en-US"/>
               <a:t>Click to edit Master text styles</a:t>
             </a:r>
           </a:p>
           <a:p>
             <a:pPr lvl="1"/>
             <a:r>
-              <a:rPr lang="en-US" smtClean="0"/>
+              <a:rPr lang="en-US"/>
               <a:t>Second level</a:t>
             </a:r>
           </a:p>
           <a:p>
             <a:pPr lvl="2"/>
             <a:r>
-              <a:rPr lang="en-US" smtClean="0"/>
+              <a:rPr lang="en-US"/>
               <a:t>Third level</a:t>
             </a:r>
           </a:p>
           <a:p>
             <a:pPr lvl="3"/>
             <a:r>
-              <a:rPr lang="en-US" smtClean="0"/>
+              <a:rPr lang="en-US"/>
               <a:t>Fourth level</a:t>
             </a:r>
           </a:p>
           <a:p>
             <a:pPr lvl="4"/>
             <a:r>
-              <a:rPr lang="en-US" smtClean="0"/>
+              <a:rPr lang="en-US"/>
               <a:t>Fifth level</a:t>
             </a:r>
-            <a:endParaRPr lang="en-US"/>
           </a:p>
         </p:txBody>
       </p:sp>
@@ -1754,7 +3543,7 @@
           <a:p>
             <a:pPr lvl="0"/>
             <a:r>
-              <a:rPr lang="en-US" smtClean="0"/>
+              <a:rPr lang="en-US"/>
               <a:t>Click to edit Master text styles</a:t>
             </a:r>
           </a:p>
@@ -1810,38 +3599,37 @@
           <a:p>
             <a:pPr lvl="0"/>
             <a:r>
-              <a:rPr lang="en-US" smtClean="0"/>
+              <a:rPr lang="en-US"/>
               <a:t>Click to edit Master text styles</a:t>
             </a:r>
           </a:p>
           <a:p>
             <a:pPr lvl="1"/>
             <a:r>
-              <a:rPr lang="en-US" smtClean="0"/>
+              <a:rPr lang="en-US"/>
               <a:t>Second level</a:t>
             </a:r>
           </a:p>
           <a:p>
             <a:pPr lvl="2"/>
             <a:r>
-              <a:rPr lang="en-US" smtClean="0"/>
+              <a:rPr lang="en-US"/>
               <a:t>Third level</a:t>
             </a:r>
           </a:p>
           <a:p>
             <a:pPr lvl="3"/>
             <a:r>
-              <a:rPr lang="en-US" smtClean="0"/>
+              <a:rPr lang="en-US"/>
               <a:t>Fourth level</a:t>
             </a:r>
           </a:p>
           <a:p>
             <a:pPr lvl="4"/>
             <a:r>
-              <a:rPr lang="en-US" smtClean="0"/>
+              <a:rPr lang="en-US"/>
               <a:t>Fifth level</a:t>
             </a:r>
-            <a:endParaRPr lang="en-US"/>
           </a:p>
         </p:txBody>
       </p:sp>
@@ -1863,7 +3651,7 @@
             <a:fld id="{1D8BD707-D9CF-40AE-B4C6-C98DA3205C09}" type="datetimeFigureOut">
               <a:rPr lang="en-US" smtClean="0"/>
               <a:pPr/>
-              <a:t>9/1/2012</a:t>
+              <a:t>1/19/26</a:t>
             </a:fld>
             <a:endParaRPr lang="en-US"/>
           </a:p>
@@ -1953,10 +3741,9 @@
           <a:lstStyle/>
           <a:p>
             <a:r>
-              <a:rPr lang="en-US" smtClean="0"/>
+              <a:rPr lang="en-US"/>
               <a:t>Click to edit Master title style</a:t>
             </a:r>
-            <a:endParaRPr lang="en-US"/>
           </a:p>
         </p:txBody>
       </p:sp>
@@ -1978,7 +3765,7 @@
             <a:fld id="{1D8BD707-D9CF-40AE-B4C6-C98DA3205C09}" type="datetimeFigureOut">
               <a:rPr lang="en-US" smtClean="0"/>
               <a:pPr/>
-              <a:t>9/1/2012</a:t>
+              <a:t>1/19/26</a:t>
             </a:fld>
             <a:endParaRPr lang="en-US"/>
           </a:p>
@@ -2070,7 +3857,7 @@
             <a:fld id="{1D8BD707-D9CF-40AE-B4C6-C98DA3205C09}" type="datetimeFigureOut">
               <a:rPr lang="en-US" smtClean="0"/>
               <a:pPr/>
-              <a:t>9/1/2012</a:t>
+              <a:t>1/19/26</a:t>
             </a:fld>
             <a:endParaRPr lang="en-US"/>
           </a:p>
@@ -2169,10 +3956,9 @@
           </a:lstStyle>
           <a:p>
             <a:r>
-              <a:rPr lang="en-US" smtClean="0"/>
+              <a:rPr lang="en-US"/>
               <a:t>Click to edit Master title style</a:t>
             </a:r>
-            <a:endParaRPr lang="en-US"/>
           </a:p>
         </p:txBody>
       </p:sp>
@@ -2226,38 +4012,37 @@
           <a:p>
             <a:pPr lvl="0"/>
             <a:r>
-              <a:rPr lang="en-US" smtClean="0"/>
+              <a:rPr lang="en-US"/>
               <a:t>Click to edit Master text styles</a:t>
             </a:r>
           </a:p>
           <a:p>
             <a:pPr lvl="1"/>
             <a:r>
-              <a:rPr lang="en-US" smtClean="0"/>
+              <a:rPr lang="en-US"/>
               <a:t>Second level</a:t>
             </a:r>
           </a:p>
           <a:p>
             <a:pPr lvl="2"/>
             <a:r>
-              <a:rPr lang="en-US" smtClean="0"/>
+              <a:rPr lang="en-US"/>
               <a:t>Third level</a:t>
             </a:r>
           </a:p>
           <a:p>
             <a:pPr lvl="3"/>
             <a:r>
-              <a:rPr lang="en-US" smtClean="0"/>
+              <a:rPr lang="en-US"/>
               <a:t>Fourth level</a:t>
             </a:r>
           </a:p>
           <a:p>
             <a:pPr lvl="4"/>
             <a:r>
-              <a:rPr lang="en-US" smtClean="0"/>
+              <a:rPr lang="en-US"/>
               <a:t>Fifth level</a:t>
             </a:r>
-            <a:endParaRPr lang="en-US"/>
           </a:p>
         </p:txBody>
       </p:sp>
@@ -2320,7 +4105,7 @@
           <a:p>
             <a:pPr lvl="0"/>
             <a:r>
-              <a:rPr lang="en-US" smtClean="0"/>
+              <a:rPr lang="en-US"/>
               <a:t>Click to edit Master text styles</a:t>
             </a:r>
           </a:p>
@@ -2344,7 +4129,7 @@
             <a:fld id="{1D8BD707-D9CF-40AE-B4C6-C98DA3205C09}" type="datetimeFigureOut">
               <a:rPr lang="en-US" smtClean="0"/>
               <a:pPr/>
-              <a:t>9/1/2012</a:t>
+              <a:t>1/19/26</a:t>
             </a:fld>
             <a:endParaRPr lang="en-US"/>
           </a:p>
@@ -2443,10 +4228,9 @@
           </a:lstStyle>
           <a:p>
             <a:r>
-              <a:rPr lang="en-US" smtClean="0"/>
+              <a:rPr lang="en-US"/>
               <a:t>Click to edit Master title style</a:t>
             </a:r>
-            <a:endParaRPr lang="en-US"/>
           </a:p>
         </p:txBody>
       </p:sp>
@@ -2570,7 +4354,7 @@
           <a:p>
             <a:pPr lvl="0"/>
             <a:r>
-              <a:rPr lang="en-US" smtClean="0"/>
+              <a:rPr lang="en-US"/>
               <a:t>Click to edit Master text styles</a:t>
             </a:r>
           </a:p>
@@ -2594,7 +4378,7 @@
             <a:fld id="{1D8BD707-D9CF-40AE-B4C6-C98DA3205C09}" type="datetimeFigureOut">
               <a:rPr lang="en-US" smtClean="0"/>
               <a:pPr/>
-              <a:t>9/1/2012</a:t>
+              <a:t>1/19/26</a:t>
             </a:fld>
             <a:endParaRPr lang="en-US"/>
           </a:p>
@@ -2699,10 +4483,9 @@
           <a:lstStyle/>
           <a:p>
             <a:r>
-              <a:rPr lang="en-US" smtClean="0"/>
+              <a:rPr lang="en-US"/>
               <a:t>Click to edit Master title style</a:t>
             </a:r>
-            <a:endParaRPr lang="en-US"/>
           </a:p>
         </p:txBody>
       </p:sp>
@@ -2733,38 +4516,37 @@
           <a:p>
             <a:pPr lvl="0"/>
             <a:r>
-              <a:rPr lang="en-US" smtClean="0"/>
+              <a:rPr lang="en-US"/>
               <a:t>Click to edit Master text styles</a:t>
             </a:r>
           </a:p>
           <a:p>
             <a:pPr lvl="1"/>
             <a:r>
-              <a:rPr lang="en-US" smtClean="0"/>
+              <a:rPr lang="en-US"/>
               <a:t>Second level</a:t>
             </a:r>
           </a:p>
           <a:p>
             <a:pPr lvl="2"/>
             <a:r>
-              <a:rPr lang="en-US" smtClean="0"/>
+              <a:rPr lang="en-US"/>
               <a:t>Third level</a:t>
             </a:r>
           </a:p>
           <a:p>
             <a:pPr lvl="3"/>
             <a:r>
-              <a:rPr lang="en-US" smtClean="0"/>
+              <a:rPr lang="en-US"/>
               <a:t>Fourth level</a:t>
             </a:r>
           </a:p>
           <a:p>
             <a:pPr lvl="4"/>
             <a:r>
-              <a:rPr lang="en-US" smtClean="0"/>
+              <a:rPr lang="en-US"/>
               <a:t>Fifth level</a:t>
             </a:r>
-            <a:endParaRPr lang="en-US"/>
           </a:p>
         </p:txBody>
       </p:sp>
@@ -2804,7 +4586,7 @@
             <a:fld id="{1D8BD707-D9CF-40AE-B4C6-C98DA3205C09}" type="datetimeFigureOut">
               <a:rPr lang="en-US" smtClean="0"/>
               <a:pPr/>
-              <a:t>9/1/2012</a:t>
+              <a:t>1/19/26</a:t>
             </a:fld>
             <a:endParaRPr lang="en-US"/>
           </a:p>
@@ -3177,6 +4959,98 @@
       </p:grpSpPr>
       <p:sp>
         <p:nvSpPr>
+          <p:cNvPr id="2" name="Title 1">
+            <a:extLst>
+              <a:ext uri="{FF2B5EF4-FFF2-40B4-BE49-F238E27FC236}">
+                <a16:creationId xmlns:a16="http://schemas.microsoft.com/office/drawing/2014/main" id="{3EE5B16F-F59E-7AC0-4159-EE83C68C050D}"/>
+              </a:ext>
+            </a:extLst>
+          </p:cNvPr>
+          <p:cNvSpPr>
+            <a:spLocks noGrp="1"/>
+          </p:cNvSpPr>
+          <p:nvPr>
+            <p:ph type="title"/>
+          </p:nvPr>
+        </p:nvSpPr>
+        <p:spPr/>
+        <p:txBody>
+          <a:bodyPr>
+            <a:normAutofit fontScale="90000"/>
+          </a:bodyPr>
+          <a:lstStyle/>
+          <a:p>
+            <a:r>
+              <a:rPr lang="en-US" dirty="0"/>
+              <a:t>My chart</a:t>
+            </a:r>
+            <a:br>
+              <a:rPr lang="en-US" dirty="0"/>
+            </a:br>
+            <a:endParaRPr lang="en-US" dirty="0"/>
+          </a:p>
+        </p:txBody>
+      </p:sp>
+      <p:graphicFrame>
+        <p:nvGraphicFramePr>
+          <p:cNvPr id="3" name="Chart 2">
+            <a:extLst>
+              <a:ext uri="{FF2B5EF4-FFF2-40B4-BE49-F238E27FC236}">
+                <a16:creationId xmlns:a16="http://schemas.microsoft.com/office/drawing/2014/main" id="{890CD357-45EB-A23E-EA3C-FB995E37B30C}"/>
+              </a:ext>
+            </a:extLst>
+          </p:cNvPr>
+          <p:cNvGraphicFramePr/>
+          <p:nvPr>
+            <p:extLst>
+              <p:ext uri="{D42A27DB-BD31-4B8C-83A1-F6EECF244321}">
+                <p14:modId xmlns:p14="http://schemas.microsoft.com/office/powerpoint/2010/main" val="2160356952"/>
+              </p:ext>
+            </p:extLst>
+          </p:nvPr>
+        </p:nvGraphicFramePr>
+        <p:xfrm>
+          <a:off x="1524000" y="1397000"/>
+          <a:ext cx="6096000" cy="4064000"/>
+        </p:xfrm>
+        <a:graphic>
+          <a:graphicData uri="http://schemas.openxmlformats.org/drawingml/2006/chart">
+            <c:chart xmlns:c="http://schemas.openxmlformats.org/drawingml/2006/chart" xmlns:r="http://schemas.openxmlformats.org/officeDocument/2006/relationships" r:id="rId2"/>
+          </a:graphicData>
+        </a:graphic>
+      </p:graphicFrame>
+    </p:spTree>
+    <p:extLst>
+      <p:ext uri="{BB962C8B-B14F-4D97-AF65-F5344CB8AC3E}">
+        <p14:creationId xmlns:p14="http://schemas.microsoft.com/office/powerpoint/2010/main" val="4034939201"/>
+      </p:ext>
+    </p:extLst>
+  </p:cSld>
+  <p:clrMapOvr>
+    <a:masterClrMapping/>
+  </p:clrMapOvr>
+</p:sld>
+</file>
+
+<file path=ppt/slides/slide2.xml><?xml version="1.0" encoding="utf-8"?>
+<p:sld xmlns:a="http://schemas.openxmlformats.org/drawingml/2006/main" xmlns:r="http://schemas.openxmlformats.org/officeDocument/2006/relationships" xmlns:p="http://schemas.openxmlformats.org/presentationml/2006/main">
+  <p:cSld>
+    <p:spTree>
+      <p:nvGrpSpPr>
+        <p:cNvPr id="1" name=""/>
+        <p:cNvGrpSpPr/>
+        <p:nvPr/>
+      </p:nvGrpSpPr>
+      <p:grpSpPr>
+        <a:xfrm>
+          <a:off x="0" y="0"/>
+          <a:ext cx="0" cy="0"/>
+          <a:chOff x="0" y="0"/>
+          <a:chExt cx="0" cy="0"/>
+        </a:xfrm>
+      </p:grpSpPr>
+      <p:sp>
+        <p:nvSpPr>
           <p:cNvPr id="4" name="Title 3"/>
           <p:cNvSpPr>
             <a:spLocks noGrp="1"/>
@@ -3191,7 +5065,7 @@
           <a:lstStyle/>
           <a:p>
             <a:r>
-              <a:rPr lang="en-US" dirty="0" smtClean="0"/>
+              <a:rPr lang="en-US" dirty="0"/>
               <a:t>My Pie Chart</a:t>
             </a:r>
             <a:endParaRPr lang="ru-RU" dirty="0"/>
@@ -3224,6 +5098,89 @@
     <p:extLst>
       <p:ext uri="{BB962C8B-B14F-4D97-AF65-F5344CB8AC3E}">
         <p14:creationId xmlns:p14="http://schemas.microsoft.com/office/powerpoint/2010/main" val="2224918824"/>
+      </p:ext>
+    </p:extLst>
+  </p:cSld>
+  <p:clrMapOvr>
+    <a:masterClrMapping/>
+  </p:clrMapOvr>
+</p:sld>
+</file>
+
+<file path=ppt/slides/slide3.xml><?xml version="1.0" encoding="utf-8"?>
+<p:sld xmlns:a="http://schemas.openxmlformats.org/drawingml/2006/main" xmlns:r="http://schemas.openxmlformats.org/officeDocument/2006/relationships" xmlns:p="http://schemas.openxmlformats.org/presentationml/2006/main">
+  <p:cSld>
+    <p:spTree>
+      <p:nvGrpSpPr>
+        <p:cNvPr id="1" name=""/>
+        <p:cNvGrpSpPr/>
+        <p:nvPr/>
+      </p:nvGrpSpPr>
+      <p:grpSpPr>
+        <a:xfrm>
+          <a:off x="0" y="0"/>
+          <a:ext cx="0" cy="0"/>
+          <a:chOff x="0" y="0"/>
+          <a:chExt cx="0" cy="0"/>
+        </a:xfrm>
+      </p:grpSpPr>
+      <p:sp>
+        <p:nvSpPr>
+          <p:cNvPr id="2" name="Title 1">
+            <a:extLst>
+              <a:ext uri="{FF2B5EF4-FFF2-40B4-BE49-F238E27FC236}">
+                <a16:creationId xmlns:a16="http://schemas.microsoft.com/office/drawing/2014/main" id="{6942581F-E022-2024-3B59-6C9AC1E8DCEF}"/>
+              </a:ext>
+            </a:extLst>
+          </p:cNvPr>
+          <p:cNvSpPr>
+            <a:spLocks noGrp="1"/>
+          </p:cNvSpPr>
+          <p:nvPr>
+            <p:ph type="title"/>
+          </p:nvPr>
+        </p:nvSpPr>
+        <p:spPr/>
+        <p:txBody>
+          <a:bodyPr/>
+          <a:lstStyle/>
+          <a:p>
+            <a:endParaRPr lang="en-US" dirty="0"/>
+          </a:p>
+        </p:txBody>
+      </p:sp>
+      <p:graphicFrame>
+        <p:nvGraphicFramePr>
+          <p:cNvPr id="3" name="Chart 2">
+            <a:extLst>
+              <a:ext uri="{FF2B5EF4-FFF2-40B4-BE49-F238E27FC236}">
+                <a16:creationId xmlns:a16="http://schemas.microsoft.com/office/drawing/2014/main" id="{DDCB2911-F32D-2C15-28FB-F4C82BFDDC02}"/>
+              </a:ext>
+            </a:extLst>
+          </p:cNvPr>
+          <p:cNvGraphicFramePr/>
+          <p:nvPr>
+            <p:extLst>
+              <p:ext uri="{D42A27DB-BD31-4B8C-83A1-F6EECF244321}">
+                <p14:modId xmlns:p14="http://schemas.microsoft.com/office/powerpoint/2010/main" val="410908987"/>
+              </p:ext>
+            </p:extLst>
+          </p:nvPr>
+        </p:nvGraphicFramePr>
+        <p:xfrm>
+          <a:off x="1524000" y="1397000"/>
+          <a:ext cx="6096000" cy="4064000"/>
+        </p:xfrm>
+        <a:graphic>
+          <a:graphicData uri="http://schemas.openxmlformats.org/drawingml/2006/chart">
+            <c:chart xmlns:c="http://schemas.openxmlformats.org/drawingml/2006/chart" xmlns:r="http://schemas.openxmlformats.org/officeDocument/2006/relationships" r:id="rId2"/>
+          </a:graphicData>
+        </a:graphic>
+      </p:graphicFrame>
+    </p:spTree>
+    <p:extLst>
+      <p:ext uri="{BB962C8B-B14F-4D97-AF65-F5344CB8AC3E}">
+        <p14:creationId xmlns:p14="http://schemas.microsoft.com/office/powerpoint/2010/main" val="1685147587"/>
       </p:ext>
     </p:extLst>
   </p:cSld>

--- a/mavenprojectSCR/src/main/resources/pie-chart-template.pptx
+++ b/mavenprojectSCR/src/main/resources/pie-chart-template.pptx
@@ -5,8 +5,8 @@
     <p:sldMasterId id="2147483648" r:id="rId1"/>
   </p:sldMasterIdLst>
   <p:sldIdLst>
-    <p:sldId id="258" r:id="rId2"/>
-    <p:sldId id="256" r:id="rId3"/>
+    <p:sldId id="256" r:id="rId2"/>
+    <p:sldId id="258" r:id="rId3"/>
     <p:sldId id="257" r:id="rId4"/>
   </p:sldIdLst>
   <p:sldSz cx="9144000" cy="6858000" type="screen4x3"/>
@@ -126,6 +126,125 @@
 </file>
 
 <file path=ppt/charts/chart1.xml><?xml version="1.0" encoding="utf-8"?>
+<c:chartSpace xmlns:c="http://schemas.openxmlformats.org/drawingml/2006/chart" xmlns:a="http://schemas.openxmlformats.org/drawingml/2006/main" xmlns:r="http://schemas.openxmlformats.org/officeDocument/2006/relationships" xmlns:c16r2="http://schemas.microsoft.com/office/drawing/2015/06/chart">
+  <c:date1904 val="0"/>
+  <c:lang val="en-US"/>
+  <c:roundedCorners val="0"/>
+  <mc:AlternateContent xmlns:mc="http://schemas.openxmlformats.org/markup-compatibility/2006">
+    <mc:Choice xmlns:c14="http://schemas.microsoft.com/office/drawing/2007/8/2/chart" Requires="c14">
+      <c14:style val="102"/>
+    </mc:Choice>
+    <mc:Fallback>
+      <c:style val="2"/>
+    </mc:Fallback>
+  </mc:AlternateContent>
+  <c:chart>
+    <c:title>
+      <c:overlay val="0"/>
+    </c:title>
+    <c:autoTitleDeleted val="0"/>
+    <c:plotArea>
+      <c:layout/>
+      <c:pieChart>
+        <c:varyColors val="1"/>
+        <c:ser>
+          <c:idx val="0"/>
+          <c:order val="0"/>
+          <c:tx>
+            <c:strRef>
+              <c:f>Sheet1!$B$1</c:f>
+              <c:strCache>
+                <c:ptCount val="1"/>
+                <c:pt idx="0">
+                  <c:v>Sales</c:v>
+                </c:pt>
+              </c:strCache>
+            </c:strRef>
+          </c:tx>
+          <c:cat>
+            <c:strRef>
+              <c:f>Sheet1!$A$2:$A$5</c:f>
+              <c:strCache>
+                <c:ptCount val="4"/>
+                <c:pt idx="0">
+                  <c:v>1st Qtr</c:v>
+                </c:pt>
+                <c:pt idx="1">
+                  <c:v>2nd Qtr</c:v>
+                </c:pt>
+                <c:pt idx="2">
+                  <c:v>3rd Qtr</c:v>
+                </c:pt>
+                <c:pt idx="3">
+                  <c:v>4th Qtr</c:v>
+                </c:pt>
+              </c:strCache>
+            </c:strRef>
+          </c:cat>
+          <c:val>
+            <c:numRef>
+              <c:f>Sheet1!$B$2:$B$5</c:f>
+              <c:numCache>
+                <c:formatCode>General</c:formatCode>
+                <c:ptCount val="4"/>
+                <c:pt idx="0">
+                  <c:v>8.1999999999999993</c:v>
+                </c:pt>
+                <c:pt idx="1">
+                  <c:v>3.2</c:v>
+                </c:pt>
+                <c:pt idx="2">
+                  <c:v>1.4</c:v>
+                </c:pt>
+                <c:pt idx="3">
+                  <c:v>1.2</c:v>
+                </c:pt>
+              </c:numCache>
+            </c:numRef>
+          </c:val>
+          <c:extLst>
+            <c:ext xmlns:c16="http://schemas.microsoft.com/office/drawing/2014/chart" uri="{C3380CC4-5D6E-409C-BE32-E72D297353CC}">
+              <c16:uniqueId val="{00000000-B412-0D46-B8EC-9A6218988CF3}"/>
+            </c:ext>
+          </c:extLst>
+        </c:ser>
+        <c:dLbls>
+          <c:showLegendKey val="0"/>
+          <c:showVal val="0"/>
+          <c:showCatName val="0"/>
+          <c:showSerName val="0"/>
+          <c:showPercent val="0"/>
+          <c:showBubbleSize val="0"/>
+          <c:showLeaderLines val="1"/>
+        </c:dLbls>
+        <c:firstSliceAng val="0"/>
+      </c:pieChart>
+    </c:plotArea>
+    <c:legend>
+      <c:legendPos val="r"/>
+      <c:overlay val="0"/>
+    </c:legend>
+    <c:plotVisOnly val="1"/>
+    <c:dispBlanksAs val="gap"/>
+    <c:showDLblsOverMax val="0"/>
+  </c:chart>
+  <c:txPr>
+    <a:bodyPr/>
+    <a:lstStyle/>
+    <a:p>
+      <a:pPr>
+        <a:defRPr sz="1800"/>
+      </a:pPr>
+      <a:endParaRPr lang="ru-RU"/>
+    </a:p>
+  </c:txPr>
+  <c:externalData r:id="rId1">
+    <c:autoUpdate val="0"/>
+  </c:externalData>
+</c:chartSpace>
+</file>
+
+<file path=ppt/charts/chart2.xml><?xml version="1.0" encoding="utf-8"?>
 <c:chartSpace xmlns:c="http://schemas.openxmlformats.org/drawingml/2006/chart" xmlns:a="http://schemas.openxmlformats.org/drawingml/2006/main" xmlns:r="http://schemas.openxmlformats.org/officeDocument/2006/relationships" xmlns:c16r2="http://schemas.microsoft.com/office/drawing/2015/06/chart">
   <c:date1904 val="0"/>
   <c:lang val="en-US"/>
@@ -452,125 +571,6 @@
     </a:p>
   </c:txPr>
   <c:externalData r:id="rId3">
-    <c:autoUpdate val="0"/>
-  </c:externalData>
-</c:chartSpace>
-</file>
-
-<file path=ppt/charts/chart2.xml><?xml version="1.0" encoding="utf-8"?>
-<c:chartSpace xmlns:c="http://schemas.openxmlformats.org/drawingml/2006/chart" xmlns:a="http://schemas.openxmlformats.org/drawingml/2006/main" xmlns:r="http://schemas.openxmlformats.org/officeDocument/2006/relationships" xmlns:c16r2="http://schemas.microsoft.com/office/drawing/2015/06/chart">
-  <c:date1904 val="0"/>
-  <c:lang val="en-US"/>
-  <c:roundedCorners val="0"/>
-  <mc:AlternateContent xmlns:mc="http://schemas.openxmlformats.org/markup-compatibility/2006">
-    <mc:Choice xmlns:c14="http://schemas.microsoft.com/office/drawing/2007/8/2/chart" Requires="c14">
-      <c14:style val="102"/>
-    </mc:Choice>
-    <mc:Fallback>
-      <c:style val="2"/>
-    </mc:Fallback>
-  </mc:AlternateContent>
-  <c:chart>
-    <c:title>
-      <c:overlay val="0"/>
-    </c:title>
-    <c:autoTitleDeleted val="0"/>
-    <c:plotArea>
-      <c:layout/>
-      <c:pieChart>
-        <c:varyColors val="1"/>
-        <c:ser>
-          <c:idx val="0"/>
-          <c:order val="0"/>
-          <c:tx>
-            <c:strRef>
-              <c:f>Sheet1!$B$1</c:f>
-              <c:strCache>
-                <c:ptCount val="1"/>
-                <c:pt idx="0">
-                  <c:v>Sales</c:v>
-                </c:pt>
-              </c:strCache>
-            </c:strRef>
-          </c:tx>
-          <c:cat>
-            <c:strRef>
-              <c:f>Sheet1!$A$2:$A$5</c:f>
-              <c:strCache>
-                <c:ptCount val="4"/>
-                <c:pt idx="0">
-                  <c:v>1st Qtr</c:v>
-                </c:pt>
-                <c:pt idx="1">
-                  <c:v>2nd Qtr</c:v>
-                </c:pt>
-                <c:pt idx="2">
-                  <c:v>3rd Qtr</c:v>
-                </c:pt>
-                <c:pt idx="3">
-                  <c:v>4th Qtr</c:v>
-                </c:pt>
-              </c:strCache>
-            </c:strRef>
-          </c:cat>
-          <c:val>
-            <c:numRef>
-              <c:f>Sheet1!$B$2:$B$5</c:f>
-              <c:numCache>
-                <c:formatCode>General</c:formatCode>
-                <c:ptCount val="4"/>
-                <c:pt idx="0">
-                  <c:v>8.1999999999999993</c:v>
-                </c:pt>
-                <c:pt idx="1">
-                  <c:v>3.2</c:v>
-                </c:pt>
-                <c:pt idx="2">
-                  <c:v>1.4</c:v>
-                </c:pt>
-                <c:pt idx="3">
-                  <c:v>1.2</c:v>
-                </c:pt>
-              </c:numCache>
-            </c:numRef>
-          </c:val>
-          <c:extLst>
-            <c:ext xmlns:c16="http://schemas.microsoft.com/office/drawing/2014/chart" uri="{C3380CC4-5D6E-409C-BE32-E72D297353CC}">
-              <c16:uniqueId val="{00000000-B412-0D46-B8EC-9A6218988CF3}"/>
-            </c:ext>
-          </c:extLst>
-        </c:ser>
-        <c:dLbls>
-          <c:showLegendKey val="0"/>
-          <c:showVal val="0"/>
-          <c:showCatName val="0"/>
-          <c:showSerName val="0"/>
-          <c:showPercent val="0"/>
-          <c:showBubbleSize val="0"/>
-          <c:showLeaderLines val="1"/>
-        </c:dLbls>
-        <c:firstSliceAng val="0"/>
-      </c:pieChart>
-    </c:plotArea>
-    <c:legend>
-      <c:legendPos val="r"/>
-      <c:overlay val="0"/>
-    </c:legend>
-    <c:plotVisOnly val="1"/>
-    <c:dispBlanksAs val="gap"/>
-    <c:showDLblsOverMax val="0"/>
-  </c:chart>
-  <c:txPr>
-    <a:bodyPr/>
-    <a:lstStyle/>
-    <a:p>
-      <a:pPr>
-        <a:defRPr sz="1800"/>
-      </a:pPr>
-      <a:endParaRPr lang="ru-RU"/>
-    </a:p>
-  </c:txPr>
-  <c:externalData r:id="rId1">
     <c:autoUpdate val="0"/>
   </c:externalData>
 </c:chartSpace>
@@ -4959,13 +4959,7 @@
       </p:grpSpPr>
       <p:sp>
         <p:nvSpPr>
-          <p:cNvPr id="2" name="Title 1">
-            <a:extLst>
-              <a:ext uri="{FF2B5EF4-FFF2-40B4-BE49-F238E27FC236}">
-                <a16:creationId xmlns:a16="http://schemas.microsoft.com/office/drawing/2014/main" id="{3EE5B16F-F59E-7AC0-4159-EE83C68C050D}"/>
-              </a:ext>
-            </a:extLst>
-          </p:cNvPr>
+          <p:cNvPr id="4" name="Title 3"/>
           <p:cNvSpPr>
             <a:spLocks noGrp="1"/>
           </p:cNvSpPr>
@@ -4975,36 +4969,25 @@
         </p:nvSpPr>
         <p:spPr/>
         <p:txBody>
-          <a:bodyPr>
-            <a:normAutofit fontScale="90000"/>
-          </a:bodyPr>
+          <a:bodyPr/>
           <a:lstStyle/>
           <a:p>
             <a:r>
               <a:rPr lang="en-US" dirty="0"/>
-              <a:t>My chart</a:t>
-            </a:r>
-            <a:br>
-              <a:rPr lang="en-US" dirty="0"/>
-            </a:br>
-            <a:endParaRPr lang="en-US" dirty="0"/>
+              <a:t>My Pie Chart</a:t>
+            </a:r>
+            <a:endParaRPr lang="ru-RU" dirty="0"/>
           </a:p>
         </p:txBody>
       </p:sp>
       <p:graphicFrame>
         <p:nvGraphicFramePr>
-          <p:cNvPr id="3" name="Chart 2">
-            <a:extLst>
-              <a:ext uri="{FF2B5EF4-FFF2-40B4-BE49-F238E27FC236}">
-                <a16:creationId xmlns:a16="http://schemas.microsoft.com/office/drawing/2014/main" id="{890CD357-45EB-A23E-EA3C-FB995E37B30C}"/>
-              </a:ext>
-            </a:extLst>
-          </p:cNvPr>
+          <p:cNvPr id="2" name="Chart 1"/>
           <p:cNvGraphicFramePr/>
           <p:nvPr>
             <p:extLst>
               <p:ext uri="{D42A27DB-BD31-4B8C-83A1-F6EECF244321}">
-                <p14:modId xmlns:p14="http://schemas.microsoft.com/office/powerpoint/2010/main" val="2160356952"/>
+                <p14:modId xmlns:p14="http://schemas.microsoft.com/office/powerpoint/2010/main" val="374107684"/>
               </p:ext>
             </p:extLst>
           </p:nvPr>
@@ -5022,7 +5005,7 @@
     </p:spTree>
     <p:extLst>
       <p:ext uri="{BB962C8B-B14F-4D97-AF65-F5344CB8AC3E}">
-        <p14:creationId xmlns:p14="http://schemas.microsoft.com/office/powerpoint/2010/main" val="4034939201"/>
+        <p14:creationId xmlns:p14="http://schemas.microsoft.com/office/powerpoint/2010/main" val="2224918824"/>
       </p:ext>
     </p:extLst>
   </p:cSld>
@@ -5051,7 +5034,13 @@
       </p:grpSpPr>
       <p:sp>
         <p:nvSpPr>
-          <p:cNvPr id="4" name="Title 3"/>
+          <p:cNvPr id="2" name="Title 1">
+            <a:extLst>
+              <a:ext uri="{FF2B5EF4-FFF2-40B4-BE49-F238E27FC236}">
+                <a16:creationId xmlns:a16="http://schemas.microsoft.com/office/drawing/2014/main" id="{3EE5B16F-F59E-7AC0-4159-EE83C68C050D}"/>
+              </a:ext>
+            </a:extLst>
+          </p:cNvPr>
           <p:cNvSpPr>
             <a:spLocks noGrp="1"/>
           </p:cNvSpPr>
@@ -5061,25 +5050,36 @@
         </p:nvSpPr>
         <p:spPr/>
         <p:txBody>
-          <a:bodyPr/>
+          <a:bodyPr>
+            <a:normAutofit fontScale="90000"/>
+          </a:bodyPr>
           <a:lstStyle/>
           <a:p>
             <a:r>
               <a:rPr lang="en-US" dirty="0"/>
-              <a:t>My Pie Chart</a:t>
-            </a:r>
-            <a:endParaRPr lang="ru-RU" dirty="0"/>
+              <a:t>My chart</a:t>
+            </a:r>
+            <a:br>
+              <a:rPr lang="en-US" dirty="0"/>
+            </a:br>
+            <a:endParaRPr lang="en-US" dirty="0"/>
           </a:p>
         </p:txBody>
       </p:sp>
       <p:graphicFrame>
         <p:nvGraphicFramePr>
-          <p:cNvPr id="2" name="Chart 1"/>
+          <p:cNvPr id="3" name="Chart 2">
+            <a:extLst>
+              <a:ext uri="{FF2B5EF4-FFF2-40B4-BE49-F238E27FC236}">
+                <a16:creationId xmlns:a16="http://schemas.microsoft.com/office/drawing/2014/main" id="{890CD357-45EB-A23E-EA3C-FB995E37B30C}"/>
+              </a:ext>
+            </a:extLst>
+          </p:cNvPr>
           <p:cNvGraphicFramePr/>
           <p:nvPr>
             <p:extLst>
               <p:ext uri="{D42A27DB-BD31-4B8C-83A1-F6EECF244321}">
-                <p14:modId xmlns:p14="http://schemas.microsoft.com/office/powerpoint/2010/main" val="374107684"/>
+                <p14:modId xmlns:p14="http://schemas.microsoft.com/office/powerpoint/2010/main" val="2160356952"/>
               </p:ext>
             </p:extLst>
           </p:nvPr>
@@ -5097,7 +5097,7 @@
     </p:spTree>
     <p:extLst>
       <p:ext uri="{BB962C8B-B14F-4D97-AF65-F5344CB8AC3E}">
-        <p14:creationId xmlns:p14="http://schemas.microsoft.com/office/powerpoint/2010/main" val="2224918824"/>
+        <p14:creationId xmlns:p14="http://schemas.microsoft.com/office/powerpoint/2010/main" val="4034939201"/>
       </p:ext>
     </p:extLst>
   </p:cSld>
